--- a/docs/presentations/issue-170-internal-ai-system-proposal.pptx
+++ b/docs/presentations/issue-170-internal-ai-system-proposal.pptx
@@ -3158,7 +3158,7 @@
               </a:defRPr>
             </a:pPr>
             <a:r>
-              <a:t>#170 기반 발표자료 / 중간형 GPU + CPU 2서버 구성</a:t>
+              <a:t>#170 최신 기준 / 기존 Git·Jenkins 재사용 / 인건비 제외</a:t>
             </a:r>
           </a:p>
         </p:txBody>
@@ -3211,7 +3211,7 @@
               </a:defRPr>
             </a:pPr>
             <a:r>
-              <a:t>구성: GPU 서버 1대(LLM/오케스트레이터/workspace) + CPU 서버 1대(Git/Jenkins)</a:t>
+              <a:t>구성: 중간형 GPU 서버 1대 + 기존 Git/Jenkins 장비 재사용</a:t>
             </a:r>
           </a:p>
           <a:p>
@@ -3241,7 +3241,7 @@
               </a:defRPr>
             </a:pPr>
             <a:r>
-              <a:t>핵심 판단: 장비는 중간형, 운영 범위는 작게 시작</a:t>
+              <a:t>핵심 비용: 초기 장비비 4,300만 ~ 7,700만원</a:t>
             </a:r>
           </a:p>
         </p:txBody>
@@ -3361,8 +3361,8 @@
         </p:nvSpPr>
         <p:spPr>
           <a:xfrm>
-            <a:off x="3200400" y="1645920"/>
-            <a:ext cx="2286000" cy="1097280"/>
+            <a:off x="3108960" y="1554480"/>
+            <a:ext cx="2377440" cy="1097280"/>
           </a:xfrm>
           <a:prstGeom prst="roundRect">
             <a:avLst/>
@@ -3419,8 +3419,8 @@
         </p:nvSpPr>
         <p:spPr>
           <a:xfrm>
-            <a:off x="1828800" y="3840480"/>
-            <a:ext cx="2743200" cy="1280160"/>
+            <a:off x="1737360" y="3840480"/>
+            <a:ext cx="2834640" cy="1371600"/>
           </a:xfrm>
           <a:prstGeom prst="roundRect">
             <a:avLst/>
@@ -3460,11 +3460,11 @@
               </a:defRPr>
             </a:pPr>
             <a:r>
-              <a:t>CPU 서버</a:t>
+              <a:t>기존 장비</a:t>
             </a:r>
             <a:br/>
             <a:r>
-              <a:t>Git + Jenkins Controller</a:t>
+              <a:t>Git + Jenkins</a:t>
             </a:r>
           </a:p>
         </p:txBody>
@@ -3477,8 +3477,8 @@
         </p:nvSpPr>
         <p:spPr>
           <a:xfrm>
-            <a:off x="6583680" y="3474720"/>
-            <a:ext cx="3840480" cy="1645920"/>
+            <a:off x="6492240" y="3657600"/>
+            <a:ext cx="3931920" cy="1554480"/>
           </a:xfrm>
           <a:prstGeom prst="roundRect">
             <a:avLst/>
@@ -3518,15 +3518,15 @@
               </a:defRPr>
             </a:pPr>
             <a:r>
-              <a:t>GPU 서버</a:t>
+              <a:t>신규 장비</a:t>
             </a:r>
             <a:br/>
             <a:r>
-              <a:t>LLM / Owner / Reviewer</a:t>
+              <a:t>중간형 GPU 서버</a:t>
             </a:r>
             <a:br/>
             <a:r>
-              <a:t>Workspace / Jenkins Agent</a:t>
+              <a:t>LLM / Owner / Reviewer / Workspace</a:t>
             </a:r>
           </a:p>
         </p:txBody>
@@ -3539,8 +3539,8 @@
         </p:nvCxnSpPr>
         <p:spPr>
           <a:xfrm flipV="1">
-            <a:off x="2651760" y="2194560"/>
-            <a:ext cx="548640" cy="457200"/>
+            <a:off x="2651760" y="2103120"/>
+            <a:ext cx="457200" cy="548640"/>
           </a:xfrm>
           <a:prstGeom prst="line">
             <a:avLst/>
@@ -3574,8 +3574,8 @@
         </p:nvCxnSpPr>
         <p:spPr>
           <a:xfrm flipH="1">
-            <a:off x="3383280" y="2743200"/>
-            <a:ext cx="914400" cy="1097280"/>
+            <a:off x="3291840" y="2651760"/>
+            <a:ext cx="1005840" cy="1188720"/>
           </a:xfrm>
           <a:prstGeom prst="line">
             <a:avLst/>
@@ -3609,8 +3609,8 @@
         </p:nvCxnSpPr>
         <p:spPr>
           <a:xfrm>
-            <a:off x="5486400" y="2194560"/>
-            <a:ext cx="1097280" cy="1645920"/>
+            <a:off x="5486400" y="2103120"/>
+            <a:ext cx="1005840" cy="1737360"/>
           </a:xfrm>
           <a:prstGeom prst="line">
             <a:avLst/>
@@ -3644,8 +3644,8 @@
         </p:nvCxnSpPr>
         <p:spPr>
           <a:xfrm>
-            <a:off x="4572000" y="4480560"/>
-            <a:ext cx="2011680" cy="0"/>
+            <a:off x="4572000" y="4526280"/>
+            <a:ext cx="1920240" cy="0"/>
           </a:xfrm>
           <a:prstGeom prst="line">
             <a:avLst/>
@@ -3885,7 +3885,7 @@
               </a:defRPr>
             </a:pPr>
             <a:r>
-              <a:t>비용 요약 (중간형 권장안)</a:t>
+              <a:t>비용 요약 (최신 기준)</a:t>
             </a:r>
           </a:p>
         </p:txBody>
@@ -4020,7 +4020,7 @@
                         <a:defRPr sz="1300" b="0"/>
                       </a:pPr>
                       <a:r>
-                        <a:t>RTX 6000 Ada / A6000 / L40S 급</a:t>
+                        <a:t>중간형 GPU 서버 1대</a:t>
                       </a:r>
                     </a:p>
                   </a:txBody>
@@ -4041,7 +4041,7 @@
                         <a:defRPr sz="1300" b="0"/>
                       </a:pPr>
                       <a:r>
-                        <a:t>CPU 서버</a:t>
+                        <a:t>스토리지/백업/UPS</a:t>
                       </a:r>
                     </a:p>
                   </a:txBody>
@@ -4060,66 +4060,7 @@
                         <a:defRPr sz="1300" b="0"/>
                       </a:pPr>
                       <a:r>
-                        <a:t>700만 ~ 1,500만원</a:t>
-                      </a:r>
-                    </a:p>
-                  </a:txBody>
-                  <a:tcPr>
-                    <a:solidFill>
-                      <a:srgbClr val="FFFFFF"/>
-                    </a:solidFill>
-                  </a:tcPr>
-                </a:tc>
-                <a:tc>
-                  <a:txBody>
-                    <a:bodyPr/>
-                    <a:lstStyle/>
-                    <a:p>
-                      <a:pPr algn="l">
-                        <a:defRPr sz="1300" b="0"/>
-                      </a:pPr>
-                      <a:r>
-                        <a:t>Git + Jenkins Controller</a:t>
-                      </a:r>
-                    </a:p>
-                  </a:txBody>
-                  <a:tcPr>
-                    <a:solidFill>
-                      <a:srgbClr val="FFFFFF"/>
-                    </a:solidFill>
-                  </a:tcPr>
-                </a:tc>
-              </a:tr>
-              <a:tr h="587828">
-                <a:tc>
-                  <a:txBody>
-                    <a:bodyPr/>
-                    <a:lstStyle/>
-                    <a:p>
-                      <a:pPr algn="l">
-                        <a:defRPr sz="1300" b="0"/>
-                      </a:pPr>
-                      <a:r>
-                        <a:t>스토리지/UPS</a:t>
-                      </a:r>
-                    </a:p>
-                  </a:txBody>
-                  <a:tcPr>
-                    <a:solidFill>
-                      <a:srgbClr val="FFFFFF"/>
-                    </a:solidFill>
-                  </a:tcPr>
-                </a:tc>
-                <a:tc>
-                  <a:txBody>
-                    <a:bodyPr/>
-                    <a:lstStyle/>
-                    <a:p>
-                      <a:pPr algn="l">
-                        <a:defRPr sz="1300" b="0"/>
-                      </a:pPr>
-                      <a:r>
-                        <a:t>500만 ~ 1,500만원</a:t>
+                        <a:t>300만 ~ 1,200만원</a:t>
                       </a:r>
                     </a:p>
                   </a:txBody>
@@ -4159,7 +4100,7 @@
                         <a:defRPr sz="1300" b="0"/>
                       </a:pPr>
                       <a:r>
-                        <a:t>구축 인건비</a:t>
+                        <a:t>초기 장비비 합계</a:t>
                       </a:r>
                     </a:p>
                   </a:txBody>
@@ -4178,7 +4119,7 @@
                         <a:defRPr sz="1300" b="0"/>
                       </a:pPr>
                       <a:r>
-                        <a:t>2,000만 ~ 4,000만원</a:t>
+                        <a:t>4,300만 ~ 7,700만원</a:t>
                       </a:r>
                     </a:p>
                   </a:txBody>
@@ -4197,7 +4138,7 @@
                         <a:defRPr sz="1300" b="0"/>
                       </a:pPr>
                       <a:r>
-                        <a:t>MVP 2~4주</a:t>
+                        <a:t>인건비 제외 / Git·Jenkins 재사용</a:t>
                       </a:r>
                     </a:p>
                   </a:txBody>
@@ -4209,65 +4150,6 @@
                 </a:tc>
               </a:tr>
               <a:tr h="587828">
-                <a:tc>
-                  <a:txBody>
-                    <a:bodyPr/>
-                    <a:lstStyle/>
-                    <a:p>
-                      <a:pPr algn="l">
-                        <a:defRPr sz="1300" b="0"/>
-                      </a:pPr>
-                      <a:r>
-                        <a:t>총 초기 구축비</a:t>
-                      </a:r>
-                    </a:p>
-                  </a:txBody>
-                  <a:tcPr>
-                    <a:solidFill>
-                      <a:srgbClr val="FFFFFF"/>
-                    </a:solidFill>
-                  </a:tcPr>
-                </a:tc>
-                <a:tc>
-                  <a:txBody>
-                    <a:bodyPr/>
-                    <a:lstStyle/>
-                    <a:p>
-                      <a:pPr algn="l">
-                        <a:defRPr sz="1300" b="0"/>
-                      </a:pPr>
-                      <a:r>
-                        <a:t>7,300만 ~ 1억 3,800만원</a:t>
-                      </a:r>
-                    </a:p>
-                  </a:txBody>
-                  <a:tcPr>
-                    <a:solidFill>
-                      <a:srgbClr val="FFFFFF"/>
-                    </a:solidFill>
-                  </a:tcPr>
-                </a:tc>
-                <a:tc>
-                  <a:txBody>
-                    <a:bodyPr/>
-                    <a:lstStyle/>
-                    <a:p>
-                      <a:pPr algn="l">
-                        <a:defRPr sz="1300" b="0"/>
-                      </a:pPr>
-                      <a:r>
-                        <a:t>세부 견적 합산 예시</a:t>
-                      </a:r>
-                    </a:p>
-                  </a:txBody>
-                  <a:tcPr>
-                    <a:solidFill>
-                      <a:srgbClr val="FFFFFF"/>
-                    </a:solidFill>
-                  </a:tcPr>
-                </a:tc>
-              </a:tr>
-              <a:tr h="587832">
                 <a:tc>
                   <a:txBody>
                     <a:bodyPr/>
@@ -4296,7 +4178,7 @@
                         <a:defRPr sz="1300" b="0"/>
                       </a:pPr>
                       <a:r>
-                        <a:t>150만 ~ 300만원</a:t>
+                        <a:t>100만 ~ 220만원</a:t>
                       </a:r>
                     </a:p>
                   </a:txBody>
@@ -4315,7 +4197,125 @@
                         <a:defRPr sz="1300" b="0"/>
                       </a:pPr>
                       <a:r>
-                        <a:t>인프라 운영비 기준</a:t>
+                        <a:t>인프라/실비 운영비</a:t>
+                      </a:r>
+                    </a:p>
+                  </a:txBody>
+                  <a:tcPr>
+                    <a:solidFill>
+                      <a:srgbClr val="FFFFFF"/>
+                    </a:solidFill>
+                  </a:tcPr>
+                </a:tc>
+              </a:tr>
+              <a:tr h="587828">
+                <a:tc>
+                  <a:txBody>
+                    <a:bodyPr/>
+                    <a:lstStyle/>
+                    <a:p>
+                      <a:pPr algn="l">
+                        <a:defRPr sz="1300" b="0"/>
+                      </a:pPr>
+                      <a:r>
+                        <a:t>연간 운영비</a:t>
+                      </a:r>
+                    </a:p>
+                  </a:txBody>
+                  <a:tcPr>
+                    <a:solidFill>
+                      <a:srgbClr val="FFFFFF"/>
+                    </a:solidFill>
+                  </a:tcPr>
+                </a:tc>
+                <a:tc>
+                  <a:txBody>
+                    <a:bodyPr/>
+                    <a:lstStyle/>
+                    <a:p>
+                      <a:pPr algn="l">
+                        <a:defRPr sz="1300" b="0"/>
+                      </a:pPr>
+                      <a:r>
+                        <a:t>1,200만 ~ 2,640만원</a:t>
+                      </a:r>
+                    </a:p>
+                  </a:txBody>
+                  <a:tcPr>
+                    <a:solidFill>
+                      <a:srgbClr val="FFFFFF"/>
+                    </a:solidFill>
+                  </a:tcPr>
+                </a:tc>
+                <a:tc>
+                  <a:txBody>
+                    <a:bodyPr/>
+                    <a:lstStyle/>
+                    <a:p>
+                      <a:pPr algn="l">
+                        <a:defRPr sz="1300" b="0"/>
+                      </a:pPr>
+                      <a:r>
+                        <a:t>인프라/실비 운영비</a:t>
+                      </a:r>
+                    </a:p>
+                  </a:txBody>
+                  <a:tcPr>
+                    <a:solidFill>
+                      <a:srgbClr val="FFFFFF"/>
+                    </a:solidFill>
+                  </a:tcPr>
+                </a:tc>
+              </a:tr>
+              <a:tr h="587832">
+                <a:tc>
+                  <a:txBody>
+                    <a:bodyPr/>
+                    <a:lstStyle/>
+                    <a:p>
+                      <a:pPr algn="l">
+                        <a:defRPr sz="1300" b="0"/>
+                      </a:pPr>
+                      <a:r>
+                        <a:t>운영관리 제외 시</a:t>
+                      </a:r>
+                    </a:p>
+                  </a:txBody>
+                  <a:tcPr>
+                    <a:solidFill>
+                      <a:srgbClr val="FFFFFF"/>
+                    </a:solidFill>
+                  </a:tcPr>
+                </a:tc>
+                <a:tc>
+                  <a:txBody>
+                    <a:bodyPr/>
+                    <a:lstStyle/>
+                    <a:p>
+                      <a:pPr algn="l">
+                        <a:defRPr sz="1300" b="0"/>
+                      </a:pPr>
+                      <a:r>
+                        <a:t>월 50만 ~ 120만원</a:t>
+                      </a:r>
+                    </a:p>
+                  </a:txBody>
+                  <a:tcPr>
+                    <a:solidFill>
+                      <a:srgbClr val="FFFFFF"/>
+                    </a:solidFill>
+                  </a:tcPr>
+                </a:tc>
+                <a:tc>
+                  <a:txBody>
+                    <a:bodyPr/>
+                    <a:lstStyle/>
+                    <a:p>
+                      <a:pPr algn="l">
+                        <a:defRPr sz="1300" b="0"/>
+                      </a:pPr>
+                      <a:r>
+                        <a:t>실비 기준 하한</a:t>
                       </a:r>
                     </a:p>
                   </a:txBody>
@@ -4447,7 +4447,7 @@
               </a:defRPr>
             </a:pPr>
             <a:r>
-              <a:t>외부망 없이 내부망에서만 운용</a:t>
+              <a:t>소스 외부 유출 위험 최소화</a:t>
             </a:r>
           </a:p>
           <a:p>
@@ -4462,7 +4462,7 @@
               </a:defRPr>
             </a:pPr>
             <a:r>
-              <a:t>소스 외부 유출 위험 최소화</a:t>
+              <a:t>기존 Git/Jenkins 활용으로 초기비용 절감</a:t>
             </a:r>
           </a:p>
           <a:p>
@@ -4492,7 +4492,7 @@
               </a:defRPr>
             </a:pPr>
             <a:r>
-              <a:t>Git/Jenkins와 분리 운영으로 안정성 확보</a:t>
+              <a:t>branch/PR 기반 통제 가능</a:t>
             </a:r>
           </a:p>
         </p:txBody>
@@ -4561,7 +4561,7 @@
               </a:defRPr>
             </a:pPr>
             <a:r>
-              <a:t>초기 인프라 비용 큼</a:t>
+              <a:t>초기 GPU 장비 비용 큼</a:t>
             </a:r>
           </a:p>
           <a:p>
@@ -4606,7 +4606,7 @@
               </a:defRPr>
             </a:pPr>
             <a:r>
-              <a:t>GPU/모델 운영 부담 존재</a:t>
+              <a:t>상용 SaaS 대비 품질 한계 가능</a:t>
             </a:r>
           </a:p>
         </p:txBody>
@@ -4697,7 +4697,7 @@
               </a:defRPr>
             </a:pPr>
             <a:r>
-              <a:t>중간형 GPU 서버 1대 + CPU 서버 1대</a:t>
+              <a:t>중간형 GPU 서버 1대 신규 도입</a:t>
             </a:r>
           </a:p>
           <a:p>
@@ -4712,7 +4712,7 @@
               </a:defRPr>
             </a:pPr>
             <a:r>
-              <a:t>저장소 1개 / 팀 1개 기준 MVP</a:t>
+              <a:t>기존 Git/Jenkins 장비 재사용</a:t>
             </a:r>
           </a:p>
           <a:p>
@@ -4727,7 +4727,7 @@
               </a:defRPr>
             </a:pPr>
             <a:r>
-              <a:t>Reviewer 우선 -&gt; Owner 추가 -&gt; 승인/반려 루프</a:t>
+              <a:t>저장소 1개 / 팀 1개 기준 MVP</a:t>
             </a:r>
           </a:p>
           <a:p>
@@ -4742,7 +4742,7 @@
               </a:defRPr>
             </a:pPr>
             <a:r>
-              <a:t>안정화 후 팀별 workspace 확장</a:t>
+              <a:t>Reviewer 우선 -&gt; Owner 추가 -&gt; 승인/반려 루프</a:t>
             </a:r>
           </a:p>
           <a:p>

--- a/docs/presentations/issue-170-internal-ai-system-proposal.pptx
+++ b/docs/presentations/issue-170-internal-ai-system-proposal.pptx
@@ -11,8 +11,32 @@
     <p:sldId id="259" r:id="rId10"/>
     <p:sldId id="260" r:id="rId11"/>
     <p:sldId id="261" r:id="rId12"/>
+    <p:sldId id="262" r:id="rId13"/>
+    <p:sldId id="263" r:id="rId14"/>
+    <p:sldId id="264" r:id="rId15"/>
+    <p:sldId id="265" r:id="rId16"/>
+    <p:sldId id="266" r:id="rId17"/>
+    <p:sldId id="267" r:id="rId18"/>
+    <p:sldId id="268" r:id="rId19"/>
+    <p:sldId id="269" r:id="rId20"/>
+    <p:sldId id="270" r:id="rId21"/>
+    <p:sldId id="271" r:id="rId22"/>
+    <p:sldId id="272" r:id="rId23"/>
+    <p:sldId id="273" r:id="rId24"/>
+    <p:sldId id="274" r:id="rId25"/>
+    <p:sldId id="275" r:id="rId26"/>
+    <p:sldId id="276" r:id="rId27"/>
+    <p:sldId id="277" r:id="rId28"/>
+    <p:sldId id="278" r:id="rId29"/>
+    <p:sldId id="279" r:id="rId30"/>
+    <p:sldId id="280" r:id="rId31"/>
+    <p:sldId id="281" r:id="rId32"/>
+    <p:sldId id="282" r:id="rId33"/>
+    <p:sldId id="283" r:id="rId34"/>
+    <p:sldId id="284" r:id="rId35"/>
+    <p:sldId id="285" r:id="rId36"/>
   </p:sldIdLst>
-  <p:sldSz cx="12191695" cy="6858000" type="screen4x3"/>
+  <p:sldSz cx="9144000" cy="6858000" type="screen4x3"/>
   <p:notesSz cx="6858000" cy="9144000"/>
   <p:defaultTextStyle>
     <a:defPPr>
@@ -3095,33 +3119,19 @@
       <p:grpSpPr/>
       <p:sp>
         <p:nvSpPr>
-          <p:cNvPr id="2" name="TextBox 1"/>
-          <p:cNvSpPr txBox="1"/>
-          <p:nvPr/>
-        </p:nvSpPr>
-        <p:spPr>
-          <a:xfrm>
-            <a:off x="457200" y="274320"/>
-            <a:ext cx="11247120" cy="640080"/>
-          </a:xfrm>
-          <a:prstGeom prst="rect">
-            <a:avLst/>
-          </a:prstGeom>
-          <a:noFill/>
-        </p:spPr>
-        <p:txBody>
-          <a:bodyPr wrap="none">
-            <a:spAutoFit/>
-          </a:bodyPr>
-          <a:lstStyle/>
-          <a:p>
-            <a:pPr>
-              <a:defRPr sz="2600" b="1">
-                <a:solidFill>
-                  <a:srgbClr val="1F4E79"/>
-                </a:solidFill>
-              </a:defRPr>
-            </a:pPr>
+          <p:cNvPr id="2" name="Title 1"/>
+          <p:cNvSpPr>
+            <a:spLocks noGrp="1"/>
+          </p:cNvSpPr>
+          <p:nvPr>
+            <p:ph type="ctrTitle"/>
+          </p:nvPr>
+        </p:nvSpPr>
+        <p:spPr/>
+        <p:txBody>
+          <a:bodyPr/>
+          <a:lstStyle/>
+          <a:p>
             <a:r>
               <a:t>사내 폐쇄망 AI 개발지원 시스템 구축 검토안</a:t>
             </a:r>
@@ -3130,118 +3140,1096 @@
       </p:sp>
       <p:sp>
         <p:nvSpPr>
-          <p:cNvPr id="3" name="TextBox 2"/>
-          <p:cNvSpPr txBox="1"/>
-          <p:nvPr/>
-        </p:nvSpPr>
-        <p:spPr>
-          <a:xfrm>
-            <a:off x="457200" y="914400"/>
-            <a:ext cx="11247120" cy="457200"/>
-          </a:xfrm>
-          <a:prstGeom prst="rect">
-            <a:avLst/>
-          </a:prstGeom>
-          <a:noFill/>
-        </p:spPr>
-        <p:txBody>
-          <a:bodyPr wrap="none">
-            <a:spAutoFit/>
-          </a:bodyPr>
-          <a:lstStyle/>
-          <a:p>
-            <a:pPr>
-              <a:defRPr sz="1200">
-                <a:solidFill>
-                  <a:srgbClr val="5A5A5A"/>
-                </a:solidFill>
-              </a:defRPr>
-            </a:pPr>
-            <a:r>
-              <a:t>#170 최신 기준 / 기존 Git·Jenkins 재사용 / 인건비 제외</a:t>
-            </a:r>
-          </a:p>
-        </p:txBody>
-      </p:sp>
-      <p:sp>
-        <p:nvSpPr>
-          <p:cNvPr id="4" name="TextBox 3"/>
-          <p:cNvSpPr txBox="1"/>
-          <p:nvPr/>
-        </p:nvSpPr>
-        <p:spPr>
-          <a:xfrm>
-            <a:off x="731520" y="1554480"/>
-            <a:ext cx="10515600" cy="4572000"/>
-          </a:xfrm>
-          <a:prstGeom prst="rect">
-            <a:avLst/>
-          </a:prstGeom>
-          <a:noFill/>
-        </p:spPr>
-        <p:txBody>
-          <a:bodyPr wrap="none">
-            <a:spAutoFit/>
-          </a:bodyPr>
-          <a:lstStyle/>
-          <a:p>
-            <a:pPr>
-              <a:spcAft>
-                <a:spcPts val="1000"/>
-              </a:spcAft>
-              <a:defRPr sz="2100">
-                <a:solidFill>
-                  <a:srgbClr val="000000"/>
-                </a:solidFill>
-              </a:defRPr>
-            </a:pPr>
-            <a:r>
-              <a:t>목표: 소스 외부 유출 없이 내부망에서 Owner/Reviewer 체계를 도입</a:t>
-            </a:r>
-          </a:p>
-          <a:p>
-            <a:pPr>
-              <a:spcAft>
-                <a:spcPts val="1000"/>
-              </a:spcAft>
-              <a:defRPr sz="2100">
-                <a:solidFill>
-                  <a:srgbClr val="000000"/>
-                </a:solidFill>
-              </a:defRPr>
-            </a:pPr>
-            <a:r>
-              <a:t>구성: 중간형 GPU 서버 1대 + 기존 Git/Jenkins 장비 재사용</a:t>
-            </a:r>
-          </a:p>
-          <a:p>
-            <a:pPr>
-              <a:spcAft>
-                <a:spcPts val="1000"/>
-              </a:spcAft>
-              <a:defRPr sz="2100">
-                <a:solidFill>
-                  <a:srgbClr val="000000"/>
-                </a:solidFill>
-              </a:defRPr>
-            </a:pPr>
-            <a:r>
-              <a:t>도입 방식: 저장소 1개, 팀 1개 기준 MVP 후 확대</a:t>
-            </a:r>
-          </a:p>
-          <a:p>
-            <a:pPr>
-              <a:spcAft>
-                <a:spcPts val="1000"/>
-              </a:spcAft>
-              <a:defRPr sz="2100">
-                <a:solidFill>
-                  <a:srgbClr val="000000"/>
-                </a:solidFill>
-              </a:defRPr>
-            </a:pPr>
-            <a:r>
-              <a:t>핵심 비용: 초기 장비비 4,300만 ~ 7,700만원</a:t>
+          <p:cNvPr id="3" name="Subtitle 2"/>
+          <p:cNvSpPr>
+            <a:spLocks noGrp="1"/>
+          </p:cNvSpPr>
+          <p:nvPr>
+            <p:ph type="subTitle" idx="1"/>
+          </p:nvPr>
+        </p:nvSpPr>
+        <p:spPr/>
+        <p:txBody>
+          <a:bodyPr/>
+          <a:lstStyle/>
+          <a:p>
+            <a:r>
+              <a:t>https://github.com/SeoArin9142/GameChatTranslator/issues/170</a:t>
+            </a:r>
+          </a:p>
+        </p:txBody>
+      </p:sp>
+    </p:spTree>
+  </p:cSld>
+  <p:clrMapOvr>
+    <a:masterClrMapping/>
+  </p:clrMapOvr>
+</p:sld>
+</file>
+
+<file path=ppt/slides/slide10.xml><?xml version="1.0" encoding="utf-8"?>
+<p:sld xmlns:a="http://schemas.openxmlformats.org/drawingml/2006/main" xmlns:p="http://schemas.openxmlformats.org/presentationml/2006/main" xmlns:r="http://schemas.openxmlformats.org/officeDocument/2006/relationships">
+  <p:cSld>
+    <p:spTree>
+      <p:nvGrpSpPr>
+        <p:cNvPr id="1" name=""/>
+        <p:cNvGrpSpPr/>
+        <p:nvPr/>
+      </p:nvGrpSpPr>
+      <p:grpSpPr/>
+      <p:sp>
+        <p:nvSpPr>
+          <p:cNvPr id="2" name="Title 1"/>
+          <p:cNvSpPr>
+            <a:spLocks noGrp="1"/>
+          </p:cNvSpPr>
+          <p:nvPr>
+            <p:ph type="title"/>
+          </p:nvPr>
+        </p:nvSpPr>
+        <p:spPr/>
+        <p:txBody>
+          <a:bodyPr/>
+          <a:lstStyle/>
+          <a:p>
+            <a:r>
+              <a:t>4. 구축 방법 (2/2)</a:t>
+            </a:r>
+          </a:p>
+        </p:txBody>
+      </p:sp>
+      <p:sp>
+        <p:nvSpPr>
+          <p:cNvPr id="3" name="Content Placeholder 2"/>
+          <p:cNvSpPr>
+            <a:spLocks noGrp="1"/>
+          </p:cNvSpPr>
+          <p:nvPr>
+            <p:ph idx="1"/>
+          </p:nvPr>
+        </p:nvSpPr>
+        <p:spPr/>
+        <p:txBody>
+          <a:bodyPr wrap="square"/>
+          <a:lstStyle/>
+          <a:p>
+            <a:pPr algn="l"/>
+            <a:r>
+              <a:rPr sz="1600"/>
+              <a:t>Owner 작업 -&gt; Reviewer 검토 -&gt; 승인/반려</a:t>
+            </a:r>
+          </a:p>
+          <a:p>
+            <a:pPr algn="l"/>
+            <a:r>
+              <a:rPr sz="1600"/>
+              <a:t>재작업 자동화</a:t>
+            </a:r>
+          </a:p>
+          <a:p>
+            <a:pPr algn="l"/>
+            <a:r>
+              <a:rPr sz="1600"/>
+              <a:t>#### 4단계: 확대 적용</a:t>
+            </a:r>
+          </a:p>
+          <a:p>
+            <a:pPr algn="l"/>
+            <a:r>
+              <a:rPr sz="1600"/>
+              <a:t>팀별 workspace 분리</a:t>
+            </a:r>
+          </a:p>
+          <a:p>
+            <a:pPr algn="l"/>
+            <a:r>
+              <a:rPr sz="1600"/>
+              <a:t>여러 저장소 확장</a:t>
+            </a:r>
+          </a:p>
+          <a:p>
+            <a:pPr algn="l"/>
+            <a:r>
+              <a:rPr sz="1600"/>
+              <a:t>필요 시 Arbiter AI 도입</a:t>
+            </a:r>
+          </a:p>
+        </p:txBody>
+      </p:sp>
+    </p:spTree>
+  </p:cSld>
+  <p:clrMapOvr>
+    <a:masterClrMapping/>
+  </p:clrMapOvr>
+</p:sld>
+</file>
+
+<file path=ppt/slides/slide11.xml><?xml version="1.0" encoding="utf-8"?>
+<p:sld xmlns:a="http://schemas.openxmlformats.org/drawingml/2006/main" xmlns:p="http://schemas.openxmlformats.org/presentationml/2006/main" xmlns:r="http://schemas.openxmlformats.org/officeDocument/2006/relationships">
+  <p:cSld>
+    <p:spTree>
+      <p:nvGrpSpPr>
+        <p:cNvPr id="1" name=""/>
+        <p:cNvGrpSpPr/>
+        <p:nvPr/>
+      </p:nvGrpSpPr>
+      <p:grpSpPr/>
+      <p:sp>
+        <p:nvSpPr>
+          <p:cNvPr id="2" name="Title 1"/>
+          <p:cNvSpPr>
+            <a:spLocks noGrp="1"/>
+          </p:cNvSpPr>
+          <p:nvPr>
+            <p:ph type="title"/>
+          </p:nvPr>
+        </p:nvSpPr>
+        <p:spPr/>
+        <p:txBody>
+          <a:bodyPr/>
+          <a:lstStyle/>
+          <a:p>
+            <a:r>
+              <a:t>5. 장점</a:t>
+            </a:r>
+          </a:p>
+        </p:txBody>
+      </p:sp>
+      <p:sp>
+        <p:nvSpPr>
+          <p:cNvPr id="3" name="Content Placeholder 2"/>
+          <p:cNvSpPr>
+            <a:spLocks noGrp="1"/>
+          </p:cNvSpPr>
+          <p:nvPr>
+            <p:ph idx="1"/>
+          </p:nvPr>
+        </p:nvSpPr>
+        <p:spPr/>
+        <p:txBody>
+          <a:bodyPr wrap="square"/>
+          <a:lstStyle/>
+          <a:p>
+            <a:pPr algn="l"/>
+            <a:r>
+              <a:rPr sz="1600"/>
+              <a:t>외부망 연결 없이 사내망 내부에서만 운용 가능</a:t>
+            </a:r>
+          </a:p>
+          <a:p>
+            <a:pPr algn="l"/>
+            <a:r>
+              <a:rPr sz="1600"/>
+              <a:t>소스 외부 유출 위험 최소화</a:t>
+            </a:r>
+          </a:p>
+          <a:p>
+            <a:pPr algn="l"/>
+            <a:r>
+              <a:rPr sz="1600"/>
+              <a:t>반복적인 코드 리뷰/테스트 확인/브랜치 작업 부담 감소</a:t>
+            </a:r>
+          </a:p>
+          <a:p>
+            <a:pPr algn="l"/>
+            <a:r>
+              <a:rPr sz="1600"/>
+              <a:t>branch/PR 기반으로 품질 관리 체계화 가능</a:t>
+            </a:r>
+          </a:p>
+          <a:p>
+            <a:pPr algn="l"/>
+            <a:r>
+              <a:rPr sz="1600"/>
+              <a:t>기존 Git/Jenkins 장비를 그대로 활용할 수 있어 초기 장비비 절감 가능</a:t>
+            </a:r>
+          </a:p>
+        </p:txBody>
+      </p:sp>
+    </p:spTree>
+  </p:cSld>
+  <p:clrMapOvr>
+    <a:masterClrMapping/>
+  </p:clrMapOvr>
+</p:sld>
+</file>
+
+<file path=ppt/slides/slide12.xml><?xml version="1.0" encoding="utf-8"?>
+<p:sld xmlns:a="http://schemas.openxmlformats.org/drawingml/2006/main" xmlns:p="http://schemas.openxmlformats.org/presentationml/2006/main" xmlns:r="http://schemas.openxmlformats.org/officeDocument/2006/relationships">
+  <p:cSld>
+    <p:spTree>
+      <p:nvGrpSpPr>
+        <p:cNvPr id="1" name=""/>
+        <p:cNvGrpSpPr/>
+        <p:nvPr/>
+      </p:nvGrpSpPr>
+      <p:grpSpPr/>
+      <p:sp>
+        <p:nvSpPr>
+          <p:cNvPr id="2" name="Title 1"/>
+          <p:cNvSpPr>
+            <a:spLocks noGrp="1"/>
+          </p:cNvSpPr>
+          <p:nvPr>
+            <p:ph type="title"/>
+          </p:nvPr>
+        </p:nvSpPr>
+        <p:spPr/>
+        <p:txBody>
+          <a:bodyPr/>
+          <a:lstStyle/>
+          <a:p>
+            <a:r>
+              <a:t>6. 단점 및 리스크 (1/2)</a:t>
+            </a:r>
+          </a:p>
+        </p:txBody>
+      </p:sp>
+      <p:sp>
+        <p:nvSpPr>
+          <p:cNvPr id="3" name="Content Placeholder 2"/>
+          <p:cNvSpPr>
+            <a:spLocks noGrp="1"/>
+          </p:cNvSpPr>
+          <p:nvPr>
+            <p:ph idx="1"/>
+          </p:nvPr>
+        </p:nvSpPr>
+        <p:spPr/>
+        <p:txBody>
+          <a:bodyPr wrap="square"/>
+          <a:lstStyle/>
+          <a:p>
+            <a:pPr algn="l"/>
+            <a:r>
+              <a:rPr sz="1600"/>
+              <a:t>초기 GPU 장비 비용이 큼</a:t>
+            </a:r>
+          </a:p>
+          <a:p>
+            <a:pPr algn="l"/>
+            <a:r>
+              <a:rPr sz="1600"/>
+              <a:t>GPU 및 내부 모델 운영 부담이 발생함</a:t>
+            </a:r>
+          </a:p>
+          <a:p>
+            <a:pPr algn="l"/>
+            <a:r>
+              <a:rPr sz="1600"/>
+              <a:t>상용 SaaS 대비 품질이 낮을 수 있음</a:t>
+            </a:r>
+          </a:p>
+          <a:p>
+            <a:pPr algn="l"/>
+            <a:r>
+              <a:rPr sz="1600"/>
+              <a:t>잘못된 수정/리뷰 결과 가능성 존재</a:t>
+            </a:r>
+          </a:p>
+          <a:p>
+            <a:pPr algn="l"/>
+            <a:r>
+              <a:rPr sz="1600"/>
+              <a:t>AI 결과를 사람이 최종 검토해야 함</a:t>
+            </a:r>
+          </a:p>
+          <a:p>
+            <a:pPr algn="l"/>
+            <a:r>
+              <a:rPr sz="1600"/>
+              <a:t>내부 운영 인력이 필요하며, 전담 인력이 없으면 특정 개발자에게 부담이 집중될 수 있음</a:t>
+            </a:r>
+          </a:p>
+          <a:p>
+            <a:pPr algn="l"/>
+            <a:r>
+              <a:rPr sz="1600"/>
+              <a:t>### 대응 방안</a:t>
+            </a:r>
+          </a:p>
+          <a:p>
+            <a:pPr algn="l"/>
+            <a:r>
+              <a:rPr sz="1600"/>
+              <a:t>초기에는 Reviewer 중심 제한 운영</a:t>
+            </a:r>
+          </a:p>
+          <a:p>
+            <a:pPr algn="l"/>
+            <a:r>
+              <a:rPr sz="1600"/>
+              <a:t>main/master 직접 수정 금지</a:t>
+            </a:r>
+          </a:p>
+          <a:p>
+            <a:pPr algn="l"/>
+            <a:r>
+              <a:rPr sz="1600"/>
+              <a:t>branch/PR 기준 운영</a:t>
+            </a:r>
+          </a:p>
+        </p:txBody>
+      </p:sp>
+    </p:spTree>
+  </p:cSld>
+  <p:clrMapOvr>
+    <a:masterClrMapping/>
+  </p:clrMapOvr>
+</p:sld>
+</file>
+
+<file path=ppt/slides/slide13.xml><?xml version="1.0" encoding="utf-8"?>
+<p:sld xmlns:a="http://schemas.openxmlformats.org/drawingml/2006/main" xmlns:p="http://schemas.openxmlformats.org/presentationml/2006/main" xmlns:r="http://schemas.openxmlformats.org/officeDocument/2006/relationships">
+  <p:cSld>
+    <p:spTree>
+      <p:nvGrpSpPr>
+        <p:cNvPr id="1" name=""/>
+        <p:cNvGrpSpPr/>
+        <p:nvPr/>
+      </p:nvGrpSpPr>
+      <p:grpSpPr/>
+      <p:sp>
+        <p:nvSpPr>
+          <p:cNvPr id="2" name="Title 1"/>
+          <p:cNvSpPr>
+            <a:spLocks noGrp="1"/>
+          </p:cNvSpPr>
+          <p:nvPr>
+            <p:ph type="title"/>
+          </p:nvPr>
+        </p:nvSpPr>
+        <p:spPr/>
+        <p:txBody>
+          <a:bodyPr/>
+          <a:lstStyle/>
+          <a:p>
+            <a:r>
+              <a:t>6. 단점 및 리스크 (2/2)</a:t>
+            </a:r>
+          </a:p>
+        </p:txBody>
+      </p:sp>
+      <p:sp>
+        <p:nvSpPr>
+          <p:cNvPr id="3" name="Content Placeholder 2"/>
+          <p:cNvSpPr>
+            <a:spLocks noGrp="1"/>
+          </p:cNvSpPr>
+          <p:nvPr>
+            <p:ph idx="1"/>
+          </p:nvPr>
+        </p:nvSpPr>
+        <p:spPr/>
+        <p:txBody>
+          <a:bodyPr wrap="square"/>
+          <a:lstStyle/>
+          <a:p>
+            <a:pPr algn="l"/>
+            <a:r>
+              <a:rPr sz="1600"/>
+              <a:t>Jenkins 결과 없는 완료 금지</a:t>
+            </a:r>
+          </a:p>
+          <a:p>
+            <a:pPr algn="l"/>
+            <a:r>
+              <a:rPr sz="1600"/>
+              <a:t>작업 이력/승인 이력 전부 기록</a:t>
+            </a:r>
+          </a:p>
+          <a:p>
+            <a:pPr algn="l"/>
+            <a:r>
+              <a:rPr sz="1600"/>
+              <a:t>기존 Git/Jenkins는 재사용하고 AI 장비만 신규 도입</a:t>
+            </a:r>
+          </a:p>
+        </p:txBody>
+      </p:sp>
+    </p:spTree>
+  </p:cSld>
+  <p:clrMapOvr>
+    <a:masterClrMapping/>
+  </p:clrMapOvr>
+</p:sld>
+</file>
+
+<file path=ppt/slides/slide14.xml><?xml version="1.0" encoding="utf-8"?>
+<p:sld xmlns:a="http://schemas.openxmlformats.org/drawingml/2006/main" xmlns:p="http://schemas.openxmlformats.org/presentationml/2006/main" xmlns:r="http://schemas.openxmlformats.org/officeDocument/2006/relationships">
+  <p:cSld>
+    <p:spTree>
+      <p:nvGrpSpPr>
+        <p:cNvPr id="1" name=""/>
+        <p:cNvGrpSpPr/>
+        <p:nvPr/>
+      </p:nvGrpSpPr>
+      <p:grpSpPr/>
+      <p:sp>
+        <p:nvSpPr>
+          <p:cNvPr id="2" name="Title 1"/>
+          <p:cNvSpPr>
+            <a:spLocks noGrp="1"/>
+          </p:cNvSpPr>
+          <p:nvPr>
+            <p:ph type="title"/>
+          </p:nvPr>
+        </p:nvSpPr>
+        <p:spPr/>
+        <p:txBody>
+          <a:bodyPr/>
+          <a:lstStyle/>
+          <a:p>
+            <a:r>
+              <a:t>7. 어떻게 사용하는지</a:t>
+            </a:r>
+          </a:p>
+        </p:txBody>
+      </p:sp>
+      <p:sp>
+        <p:nvSpPr>
+          <p:cNvPr id="3" name="Content Placeholder 2"/>
+          <p:cNvSpPr>
+            <a:spLocks noGrp="1"/>
+          </p:cNvSpPr>
+          <p:nvPr>
+            <p:ph idx="1"/>
+          </p:nvPr>
+        </p:nvSpPr>
+        <p:spPr/>
+        <p:txBody>
+          <a:bodyPr wrap="square"/>
+          <a:lstStyle/>
+          <a:p>
+            <a:pPr algn="l"/>
+            <a:r>
+              <a:rPr sz="1600"/>
+              <a:t>1. 개발자가 작업 생성</a:t>
+            </a:r>
+          </a:p>
+          <a:p>
+            <a:pPr algn="l"/>
+            <a:r>
+              <a:rPr sz="1600"/>
+              <a:t>2. 시스템이 workspace 할당</a:t>
+            </a:r>
+          </a:p>
+          <a:p>
+            <a:pPr algn="l"/>
+            <a:r>
+              <a:rPr sz="1600"/>
+              <a:t>3. Owner AI가 코드 수정 및 테스트 수행</a:t>
+            </a:r>
+          </a:p>
+          <a:p>
+            <a:pPr algn="l"/>
+            <a:r>
+              <a:rPr sz="1600"/>
+              <a:t>4. Jenkins가 빌드/테스트 실행</a:t>
+            </a:r>
+          </a:p>
+          <a:p>
+            <a:pPr algn="l"/>
+            <a:r>
+              <a:rPr sz="1600"/>
+              <a:t>5. Reviewer AI가 결과 검토</a:t>
+            </a:r>
+          </a:p>
+          <a:p>
+            <a:pPr algn="l"/>
+            <a:r>
+              <a:rPr sz="1600"/>
+              <a:t>6. 승인 시 PR 유지, 반려 시 재작업</a:t>
+            </a:r>
+          </a:p>
+          <a:p>
+            <a:pPr algn="l"/>
+            <a:r>
+              <a:rPr sz="1600"/>
+              <a:t>즉, 개발자를 대체하는 구조가 아니라</a:t>
+            </a:r>
+          </a:p>
+          <a:p>
+            <a:pPr algn="l"/>
+            <a:r>
+              <a:rPr sz="1600"/>
+              <a:t>**개발자의 반복 작업을 줄이고 검토 보조를 제공하는 구조**로 운영합니다.</a:t>
+            </a:r>
+          </a:p>
+        </p:txBody>
+      </p:sp>
+    </p:spTree>
+  </p:cSld>
+  <p:clrMapOvr>
+    <a:masterClrMapping/>
+  </p:clrMapOvr>
+</p:sld>
+</file>
+
+<file path=ppt/slides/slide15.xml><?xml version="1.0" encoding="utf-8"?>
+<p:sld xmlns:a="http://schemas.openxmlformats.org/drawingml/2006/main" xmlns:p="http://schemas.openxmlformats.org/presentationml/2006/main" xmlns:r="http://schemas.openxmlformats.org/officeDocument/2006/relationships">
+  <p:cSld>
+    <p:spTree>
+      <p:nvGrpSpPr>
+        <p:cNvPr id="1" name=""/>
+        <p:cNvGrpSpPr/>
+        <p:nvPr/>
+      </p:nvGrpSpPr>
+      <p:grpSpPr/>
+      <p:sp>
+        <p:nvSpPr>
+          <p:cNvPr id="2" name="Title 1"/>
+          <p:cNvSpPr>
+            <a:spLocks noGrp="1"/>
+          </p:cNvSpPr>
+          <p:nvPr>
+            <p:ph type="title"/>
+          </p:nvPr>
+        </p:nvSpPr>
+        <p:spPr/>
+        <p:txBody>
+          <a:bodyPr/>
+          <a:lstStyle/>
+          <a:p>
+            <a:r>
+              <a:t>8. 필요한 장비 (1/2)</a:t>
+            </a:r>
+          </a:p>
+        </p:txBody>
+      </p:sp>
+      <p:sp>
+        <p:nvSpPr>
+          <p:cNvPr id="3" name="Content Placeholder 2"/>
+          <p:cNvSpPr>
+            <a:spLocks noGrp="1"/>
+          </p:cNvSpPr>
+          <p:nvPr>
+            <p:ph idx="1"/>
+          </p:nvPr>
+        </p:nvSpPr>
+        <p:spPr/>
+        <p:txBody>
+          <a:bodyPr wrap="square"/>
+          <a:lstStyle/>
+          <a:p>
+            <a:pPr algn="l"/>
+            <a:r>
+              <a:rPr sz="1600"/>
+              <a:t>### 최소 권장 장비</a:t>
+            </a:r>
+          </a:p>
+          <a:p>
+            <a:pPr algn="l"/>
+            <a:r>
+              <a:rPr sz="1600"/>
+              <a:t>**GPU 서버 1대**</a:t>
+            </a:r>
+          </a:p>
+          <a:p>
+            <a:pPr algn="l"/>
+            <a:r>
+              <a:rPr sz="1600"/>
+              <a:t>중간형 GPU 장비</a:t>
+            </a:r>
+          </a:p>
+          <a:p>
+            <a:pPr algn="l"/>
+            <a:r>
+              <a:rPr sz="1600"/>
+              <a:t>RAM 256GB 기준</a:t>
+            </a:r>
+          </a:p>
+          <a:p>
+            <a:pPr algn="l"/>
+            <a:r>
+              <a:rPr sz="1600"/>
+              <a:t>내부 LLM / Owner / Reviewer / 오케스트레이터 / workspace 운영</a:t>
+            </a:r>
+          </a:p>
+          <a:p>
+            <a:pPr algn="l"/>
+            <a:r>
+              <a:rPr sz="1600"/>
+              <a:t>**기존 Git/Jenkins 장비 재사용**</a:t>
+            </a:r>
+          </a:p>
+          <a:p>
+            <a:pPr algn="l"/>
+            <a:r>
+              <a:rPr sz="1600"/>
+              <a:t>NAS 또는 백업 스토리지</a:t>
+            </a:r>
+          </a:p>
+          <a:p>
+            <a:pPr algn="l"/>
+            <a:r>
+              <a:rPr sz="1600"/>
+              <a:t>UPS</a:t>
+            </a:r>
+          </a:p>
+          <a:p>
+            <a:pPr algn="l"/>
+            <a:r>
+              <a:rPr sz="1600"/>
+              <a:t>### 권장 운영 장비 구성</a:t>
+            </a:r>
+          </a:p>
+          <a:p>
+            <a:pPr algn="l"/>
+            <a:r>
+              <a:rPr sz="1600"/>
+              <a:t>**중간형 GPU 서버 1대 + 기존 Git/Jenkins 장비 재사용**</a:t>
+            </a:r>
+          </a:p>
+        </p:txBody>
+      </p:sp>
+    </p:spTree>
+  </p:cSld>
+  <p:clrMapOvr>
+    <a:masterClrMapping/>
+  </p:clrMapOvr>
+</p:sld>
+</file>
+
+<file path=ppt/slides/slide16.xml><?xml version="1.0" encoding="utf-8"?>
+<p:sld xmlns:a="http://schemas.openxmlformats.org/drawingml/2006/main" xmlns:p="http://schemas.openxmlformats.org/presentationml/2006/main" xmlns:r="http://schemas.openxmlformats.org/officeDocument/2006/relationships">
+  <p:cSld>
+    <p:spTree>
+      <p:nvGrpSpPr>
+        <p:cNvPr id="1" name=""/>
+        <p:cNvGrpSpPr/>
+        <p:nvPr/>
+      </p:nvGrpSpPr>
+      <p:grpSpPr/>
+      <p:sp>
+        <p:nvSpPr>
+          <p:cNvPr id="2" name="Title 1"/>
+          <p:cNvSpPr>
+            <a:spLocks noGrp="1"/>
+          </p:cNvSpPr>
+          <p:nvPr>
+            <p:ph type="title"/>
+          </p:nvPr>
+        </p:nvSpPr>
+        <p:spPr/>
+        <p:txBody>
+          <a:bodyPr/>
+          <a:lstStyle/>
+          <a:p>
+            <a:r>
+              <a:t>8. 필요한 장비 (2/2)</a:t>
+            </a:r>
+          </a:p>
+        </p:txBody>
+      </p:sp>
+      <p:sp>
+        <p:nvSpPr>
+          <p:cNvPr id="3" name="Content Placeholder 2"/>
+          <p:cNvSpPr>
+            <a:spLocks noGrp="1"/>
+          </p:cNvSpPr>
+          <p:nvPr>
+            <p:ph idx="1"/>
+          </p:nvPr>
+        </p:nvSpPr>
+        <p:spPr/>
+        <p:txBody>
+          <a:bodyPr wrap="square"/>
+          <a:lstStyle/>
+          <a:p>
+            <a:pPr algn="l"/>
+            <a:r>
+              <a:rPr sz="1600"/>
+              <a:t>팀 1개 / 저장소 1개 MVP 운영 가능 수준</a:t>
+            </a:r>
+          </a:p>
+          <a:p>
+            <a:pPr algn="l"/>
+            <a:r>
+              <a:rPr sz="1600"/>
+              <a:t>운영 안정화 후 필요 시 GPU 서버 추가 증설 검토</a:t>
+            </a:r>
+          </a:p>
+          <a:p>
+            <a:pPr algn="l"/>
+            <a:r>
+              <a:rPr sz="1600"/>
+              <a:t>### 운영 환경</a:t>
+            </a:r>
+          </a:p>
+          <a:p>
+            <a:pPr algn="l"/>
+            <a:r>
+              <a:rPr sz="1600"/>
+              <a:t>폐쇄망 내부 전용 네트워크</a:t>
+            </a:r>
+          </a:p>
+          <a:p>
+            <a:pPr algn="l"/>
+            <a:r>
+              <a:rPr sz="1600"/>
+              <a:t>팀별 또는 개인별 workspace 운영 환경</a:t>
+            </a:r>
+          </a:p>
+          <a:p>
+            <a:pPr algn="l"/>
+            <a:r>
+              <a:rPr sz="1600"/>
+              <a:t>작업/로그/승인 이력 저장용 서버 또는 DB</a:t>
+            </a:r>
+          </a:p>
+        </p:txBody>
+      </p:sp>
+    </p:spTree>
+  </p:cSld>
+  <p:clrMapOvr>
+    <a:masterClrMapping/>
+  </p:clrMapOvr>
+</p:sld>
+</file>
+
+<file path=ppt/slides/slide17.xml><?xml version="1.0" encoding="utf-8"?>
+<p:sld xmlns:a="http://schemas.openxmlformats.org/drawingml/2006/main" xmlns:p="http://schemas.openxmlformats.org/presentationml/2006/main" xmlns:r="http://schemas.openxmlformats.org/officeDocument/2006/relationships">
+  <p:cSld>
+    <p:spTree>
+      <p:nvGrpSpPr>
+        <p:cNvPr id="1" name=""/>
+        <p:cNvGrpSpPr/>
+        <p:nvPr/>
+      </p:nvGrpSpPr>
+      <p:grpSpPr/>
+      <p:sp>
+        <p:nvSpPr>
+          <p:cNvPr id="2" name="Title 1"/>
+          <p:cNvSpPr>
+            <a:spLocks noGrp="1"/>
+          </p:cNvSpPr>
+          <p:nvPr>
+            <p:ph type="title"/>
+          </p:nvPr>
+        </p:nvSpPr>
+        <p:spPr/>
+        <p:txBody>
+          <a:bodyPr/>
+          <a:lstStyle/>
+          <a:p>
+            <a:r>
+              <a:t>9. PPT 1장 발표용 요약 문구 (1/3)</a:t>
+            </a:r>
+          </a:p>
+        </p:txBody>
+      </p:sp>
+      <p:sp>
+        <p:nvSpPr>
+          <p:cNvPr id="3" name="Content Placeholder 2"/>
+          <p:cNvSpPr>
+            <a:spLocks noGrp="1"/>
+          </p:cNvSpPr>
+          <p:nvPr>
+            <p:ph idx="1"/>
+          </p:nvPr>
+        </p:nvSpPr>
+        <p:spPr/>
+        <p:txBody>
+          <a:bodyPr wrap="square"/>
+          <a:lstStyle/>
+          <a:p>
+            <a:pPr algn="l"/>
+            <a:r>
+              <a:rPr sz="1600"/>
+              <a:t>### 제목</a:t>
+            </a:r>
+          </a:p>
+          <a:p>
+            <a:pPr algn="l"/>
+            <a:r>
+              <a:rPr sz="1600"/>
+              <a:t>사내 폐쇄망 AI 개발지원 시스템 구축 검토안</a:t>
+            </a:r>
+          </a:p>
+          <a:p>
+            <a:pPr algn="l"/>
+            <a:r>
+              <a:rPr sz="1600"/>
+              <a:t>### 배경</a:t>
+            </a:r>
+          </a:p>
+          <a:p>
+            <a:pPr algn="l"/>
+            <a:r>
+              <a:rPr sz="1600"/>
+              <a:t>반복적인 코드 리뷰, 테스트 확인, 브랜치 작업 부담 증가</a:t>
+            </a:r>
+          </a:p>
+          <a:p>
+            <a:pPr algn="l"/>
+            <a:r>
+              <a:rPr sz="1600"/>
+              <a:t>외부 SaaS AI는 소스 외부 유출 위험으로 활용 제한</a:t>
+            </a:r>
+          </a:p>
+          <a:p>
+            <a:pPr algn="l"/>
+            <a:r>
+              <a:rPr sz="1600"/>
+              <a:t>폐쇄망 내부에서만 동작하는 AI 개발지원 체계 필요</a:t>
+            </a:r>
+          </a:p>
+          <a:p>
+            <a:pPr algn="l"/>
+            <a:r>
+              <a:rPr sz="1600"/>
+              <a:t>### 제안 내용</a:t>
+            </a:r>
+          </a:p>
+          <a:p>
+            <a:pPr algn="l"/>
+            <a:r>
+              <a:rPr sz="1600"/>
+              <a:t>Owner AI: 코드 수정 / 테스트 / PR 생성 지원</a:t>
+            </a:r>
+          </a:p>
+          <a:p>
+            <a:pPr algn="l"/>
+            <a:r>
+              <a:rPr sz="1600"/>
+              <a:t>Reviewer AI: 변경사항 검토 / 승인·반려 판단 지원</a:t>
+            </a:r>
+          </a:p>
+          <a:p>
+            <a:pPr algn="l"/>
+            <a:r>
+              <a:rPr sz="1600"/>
+              <a:t>기존 Git / Jenkins 재사용</a:t>
+            </a:r>
+          </a:p>
+        </p:txBody>
+      </p:sp>
+    </p:spTree>
+  </p:cSld>
+  <p:clrMapOvr>
+    <a:masterClrMapping/>
+  </p:clrMapOvr>
+</p:sld>
+</file>
+
+<file path=ppt/slides/slide18.xml><?xml version="1.0" encoding="utf-8"?>
+<p:sld xmlns:a="http://schemas.openxmlformats.org/drawingml/2006/main" xmlns:p="http://schemas.openxmlformats.org/presentationml/2006/main" xmlns:r="http://schemas.openxmlformats.org/officeDocument/2006/relationships">
+  <p:cSld>
+    <p:spTree>
+      <p:nvGrpSpPr>
+        <p:cNvPr id="1" name=""/>
+        <p:cNvGrpSpPr/>
+        <p:nvPr/>
+      </p:nvGrpSpPr>
+      <p:grpSpPr/>
+      <p:sp>
+        <p:nvSpPr>
+          <p:cNvPr id="2" name="Title 1"/>
+          <p:cNvSpPr>
+            <a:spLocks noGrp="1"/>
+          </p:cNvSpPr>
+          <p:nvPr>
+            <p:ph type="title"/>
+          </p:nvPr>
+        </p:nvSpPr>
+        <p:spPr/>
+        <p:txBody>
+          <a:bodyPr/>
+          <a:lstStyle/>
+          <a:p>
+            <a:r>
+              <a:t>9. PPT 1장 발표용 요약 문구 (2/3)</a:t>
+            </a:r>
+          </a:p>
+        </p:txBody>
+      </p:sp>
+      <p:sp>
+        <p:nvSpPr>
+          <p:cNvPr id="3" name="Content Placeholder 2"/>
+          <p:cNvSpPr>
+            <a:spLocks noGrp="1"/>
+          </p:cNvSpPr>
+          <p:nvPr>
+            <p:ph idx="1"/>
+          </p:nvPr>
+        </p:nvSpPr>
+        <p:spPr/>
+        <p:txBody>
+          <a:bodyPr wrap="square"/>
+          <a:lstStyle/>
+          <a:p>
+            <a:pPr algn="l"/>
+            <a:r>
+              <a:rPr sz="1600"/>
+              <a:t>팀별·개인별 workspace 분리 운영</a:t>
+            </a:r>
+          </a:p>
+          <a:p>
+            <a:pPr algn="l"/>
+            <a:r>
+              <a:rPr sz="1600"/>
+              <a:t>**중간형 GPU 서버 1대 신규 도입 권장**</a:t>
+            </a:r>
+          </a:p>
+          <a:p>
+            <a:pPr algn="l"/>
+            <a:r>
+              <a:rPr sz="1600"/>
+              <a:t>### 기대 효과</a:t>
+            </a:r>
+          </a:p>
+          <a:p>
+            <a:pPr algn="l"/>
+            <a:r>
+              <a:rPr sz="1600"/>
+              <a:t>개발 생산성 향상</a:t>
+            </a:r>
+          </a:p>
+          <a:p>
+            <a:pPr algn="l"/>
+            <a:r>
+              <a:rPr sz="1600"/>
+              <a:t>리뷰 및 테스트 검토 체계화</a:t>
+            </a:r>
+          </a:p>
+          <a:p>
+            <a:pPr algn="l"/>
+            <a:r>
+              <a:rPr sz="1600"/>
+              <a:t>소스 외부 유출 없이 내부망에서만 운용 가능</a:t>
+            </a:r>
+          </a:p>
+          <a:p>
+            <a:pPr algn="l"/>
+            <a:r>
+              <a:rPr sz="1600"/>
+              <a:t>기존 장비 활용으로 초기 투자 부담 완화</a:t>
+            </a:r>
+          </a:p>
+          <a:p>
+            <a:pPr algn="l"/>
+            <a:r>
+              <a:rPr sz="1600"/>
+              <a:t>### 비용</a:t>
+            </a:r>
+          </a:p>
+          <a:p>
+            <a:pPr algn="l"/>
+            <a:r>
+              <a:rPr sz="1600"/>
+              <a:t>초기 장비비: **4,300만 ~ 7,700만원**</a:t>
+            </a:r>
+          </a:p>
+          <a:p>
+            <a:pPr algn="l"/>
+            <a:r>
+              <a:rPr sz="1600"/>
+              <a:t>월간 운영비: **100만 ~ 220만원**</a:t>
+            </a:r>
+          </a:p>
+        </p:txBody>
+      </p:sp>
+    </p:spTree>
+  </p:cSld>
+  <p:clrMapOvr>
+    <a:masterClrMapping/>
+  </p:clrMapOvr>
+</p:sld>
+</file>
+
+<file path=ppt/slides/slide19.xml><?xml version="1.0" encoding="utf-8"?>
+<p:sld xmlns:a="http://schemas.openxmlformats.org/drawingml/2006/main" xmlns:p="http://schemas.openxmlformats.org/presentationml/2006/main" xmlns:r="http://schemas.openxmlformats.org/officeDocument/2006/relationships">
+  <p:cSld>
+    <p:spTree>
+      <p:nvGrpSpPr>
+        <p:cNvPr id="1" name=""/>
+        <p:cNvGrpSpPr/>
+        <p:nvPr/>
+      </p:nvGrpSpPr>
+      <p:grpSpPr/>
+      <p:sp>
+        <p:nvSpPr>
+          <p:cNvPr id="2" name="Title 1"/>
+          <p:cNvSpPr>
+            <a:spLocks noGrp="1"/>
+          </p:cNvSpPr>
+          <p:nvPr>
+            <p:ph type="title"/>
+          </p:nvPr>
+        </p:nvSpPr>
+        <p:spPr/>
+        <p:txBody>
+          <a:bodyPr/>
+          <a:lstStyle/>
+          <a:p>
+            <a:r>
+              <a:t>9. PPT 1장 발표용 요약 문구 (3/3)</a:t>
+            </a:r>
+          </a:p>
+        </p:txBody>
+      </p:sp>
+      <p:sp>
+        <p:nvSpPr>
+          <p:cNvPr id="3" name="Content Placeholder 2"/>
+          <p:cNvSpPr>
+            <a:spLocks noGrp="1"/>
+          </p:cNvSpPr>
+          <p:nvPr>
+            <p:ph idx="1"/>
+          </p:nvPr>
+        </p:nvSpPr>
+        <p:spPr/>
+        <p:txBody>
+          <a:bodyPr wrap="square"/>
+          <a:lstStyle/>
+          <a:p>
+            <a:pPr algn="l"/>
+            <a:r>
+              <a:rPr sz="1600"/>
+              <a:t>연간 운영비: **1,200만 ~ 2,640만원**</a:t>
+            </a:r>
+          </a:p>
+          <a:p>
+            <a:pPr algn="l"/>
+            <a:r>
+              <a:rPr sz="1600"/>
+              <a:t>### 제안</a:t>
+            </a:r>
+          </a:p>
+          <a:p>
+            <a:pPr algn="l"/>
+            <a:r>
+              <a:rPr sz="1600"/>
+              <a:t>**중간형 GPU 서버 1대 + 기존 Git/Jenkins 재사용**</a:t>
+            </a:r>
+          </a:p>
+          <a:p>
+            <a:pPr algn="l"/>
+            <a:r>
+              <a:rPr sz="1600"/>
+              <a:t>**저장소 1개, 팀 1개 기준 MVP**부터 단계 도입 검토</a:t>
+            </a:r>
+          </a:p>
+          <a:p>
+            <a:pPr algn="l"/>
+            <a:r>
+              <a:rPr sz="1600"/>
+              <a:t>안정화 후 확대 적용</a:t>
+            </a:r>
+          </a:p>
+          <a:p>
+            <a:pPr algn="l"/>
+            <a:r>
+              <a:rPr sz="1600"/>
+              <a:t>### 회의용 한 줄</a:t>
+            </a:r>
+          </a:p>
+          <a:p>
+            <a:pPr algn="l"/>
+            <a:r>
+              <a:rPr sz="1600"/>
+              <a:t>외부 AI를 쓰자는 것이 아니라, **소스 외부 유출 없이 내부망에서만 동작하는 개발지원 시스템을 기존 Git/Jenkins 장비를 활용하여 중간형 GPU 서버 1대 기준으로 소규모 MVP부터 도입해 보자는 제안**입니다.</a:t>
             </a:r>
           </a:p>
         </p:txBody>
@@ -3266,411 +4254,1109 @@
       <p:grpSpPr/>
       <p:sp>
         <p:nvSpPr>
-          <p:cNvPr id="2" name="TextBox 1"/>
-          <p:cNvSpPr txBox="1"/>
-          <p:nvPr/>
-        </p:nvSpPr>
-        <p:spPr>
-          <a:xfrm>
-            <a:off x="457200" y="274320"/>
-            <a:ext cx="11247120" cy="640080"/>
-          </a:xfrm>
-          <a:prstGeom prst="rect">
-            <a:avLst/>
-          </a:prstGeom>
-          <a:noFill/>
-        </p:spPr>
-        <p:txBody>
-          <a:bodyPr wrap="none">
-            <a:spAutoFit/>
-          </a:bodyPr>
-          <a:lstStyle/>
-          <a:p>
-            <a:pPr>
-              <a:defRPr sz="2600" b="1">
-                <a:solidFill>
-                  <a:srgbClr val="1F4E79"/>
-                </a:solidFill>
-              </a:defRPr>
-            </a:pPr>
-            <a:r>
-              <a:t>권장 인프라 구성</a:t>
-            </a:r>
-          </a:p>
-        </p:txBody>
-      </p:sp>
-      <p:sp>
-        <p:nvSpPr>
-          <p:cNvPr id="3" name="Rounded Rectangle 2"/>
-          <p:cNvSpPr/>
-          <p:nvPr/>
-        </p:nvSpPr>
-        <p:spPr>
-          <a:xfrm>
-            <a:off x="640080" y="2194560"/>
-            <a:ext cx="2011680" cy="914400"/>
-          </a:xfrm>
-          <a:prstGeom prst="roundRect">
-            <a:avLst/>
-          </a:prstGeom>
-          <a:solidFill>
-            <a:srgbClr val="EBF1DE"/>
-          </a:solidFill>
-          <a:ln>
-            <a:solidFill>
-              <a:srgbClr val="1F4E79"/>
-            </a:solidFill>
-          </a:ln>
-        </p:spPr>
-        <p:style>
-          <a:lnRef idx="1">
-            <a:schemeClr val="accent1"/>
-          </a:lnRef>
-          <a:fillRef idx="3">
-            <a:schemeClr val="accent1"/>
-          </a:fillRef>
-          <a:effectRef idx="2">
-            <a:schemeClr val="accent1"/>
-          </a:effectRef>
-          <a:fontRef idx="minor">
-            <a:schemeClr val="lt1"/>
-          </a:fontRef>
-        </p:style>
-        <p:txBody>
-          <a:bodyPr rtlCol="0" anchor="ctr"/>
-          <a:lstStyle/>
-          <a:p>
-            <a:pPr algn="ctr">
-              <a:defRPr sz="1600" b="1">
-                <a:solidFill>
-                  <a:srgbClr val="000000"/>
-                </a:solidFill>
-              </a:defRPr>
-            </a:pPr>
-            <a:r>
-              <a:t>개발자 / 요청자</a:t>
-            </a:r>
-          </a:p>
-        </p:txBody>
-      </p:sp>
-      <p:sp>
-        <p:nvSpPr>
-          <p:cNvPr id="4" name="Rounded Rectangle 3"/>
-          <p:cNvSpPr/>
-          <p:nvPr/>
-        </p:nvSpPr>
-        <p:spPr>
-          <a:xfrm>
-            <a:off x="3108960" y="1554480"/>
-            <a:ext cx="2377440" cy="1097280"/>
-          </a:xfrm>
-          <a:prstGeom prst="roundRect">
-            <a:avLst/>
-          </a:prstGeom>
-          <a:solidFill>
-            <a:srgbClr val="F4B183"/>
-          </a:solidFill>
-          <a:ln>
-            <a:solidFill>
-              <a:srgbClr val="1F4E79"/>
-            </a:solidFill>
-          </a:ln>
-        </p:spPr>
-        <p:style>
-          <a:lnRef idx="1">
-            <a:schemeClr val="accent1"/>
-          </a:lnRef>
-          <a:fillRef idx="3">
-            <a:schemeClr val="accent1"/>
-          </a:fillRef>
-          <a:effectRef idx="2">
-            <a:schemeClr val="accent1"/>
-          </a:effectRef>
-          <a:fontRef idx="minor">
-            <a:schemeClr val="lt1"/>
-          </a:fontRef>
-        </p:style>
-        <p:txBody>
-          <a:bodyPr rtlCol="0" anchor="ctr"/>
-          <a:lstStyle/>
-          <a:p>
-            <a:pPr algn="ctr">
-              <a:defRPr sz="1600" b="1">
-                <a:solidFill>
-                  <a:srgbClr val="000000"/>
-                </a:solidFill>
-              </a:defRPr>
-            </a:pPr>
-            <a:r>
-              <a:t>오케스트레이터</a:t>
-            </a:r>
-            <a:br/>
-            <a:r>
-              <a:t>Task / Allocator / Audit</a:t>
-            </a:r>
-          </a:p>
-        </p:txBody>
-      </p:sp>
-      <p:sp>
-        <p:nvSpPr>
-          <p:cNvPr id="5" name="Rounded Rectangle 4"/>
-          <p:cNvSpPr/>
-          <p:nvPr/>
-        </p:nvSpPr>
-        <p:spPr>
-          <a:xfrm>
-            <a:off x="1737360" y="3840480"/>
-            <a:ext cx="2834640" cy="1371600"/>
-          </a:xfrm>
-          <a:prstGeom prst="roundRect">
-            <a:avLst/>
-          </a:prstGeom>
-          <a:solidFill>
-            <a:srgbClr val="E6E6E6"/>
-          </a:solidFill>
-          <a:ln>
-            <a:solidFill>
-              <a:srgbClr val="1F4E79"/>
-            </a:solidFill>
-          </a:ln>
-        </p:spPr>
-        <p:style>
-          <a:lnRef idx="1">
-            <a:schemeClr val="accent1"/>
-          </a:lnRef>
-          <a:fillRef idx="3">
-            <a:schemeClr val="accent1"/>
-          </a:fillRef>
-          <a:effectRef idx="2">
-            <a:schemeClr val="accent1"/>
-          </a:effectRef>
-          <a:fontRef idx="minor">
-            <a:schemeClr val="lt1"/>
-          </a:fontRef>
-        </p:style>
-        <p:txBody>
-          <a:bodyPr rtlCol="0" anchor="ctr"/>
-          <a:lstStyle/>
-          <a:p>
-            <a:pPr algn="ctr">
-              <a:defRPr sz="1600" b="1">
-                <a:solidFill>
-                  <a:srgbClr val="000000"/>
-                </a:solidFill>
-              </a:defRPr>
-            </a:pPr>
-            <a:r>
-              <a:t>기존 장비</a:t>
-            </a:r>
-            <a:br/>
-            <a:r>
-              <a:t>Git + Jenkins</a:t>
-            </a:r>
-          </a:p>
-        </p:txBody>
-      </p:sp>
-      <p:sp>
-        <p:nvSpPr>
-          <p:cNvPr id="6" name="Rounded Rectangle 5"/>
-          <p:cNvSpPr/>
-          <p:nvPr/>
-        </p:nvSpPr>
-        <p:spPr>
-          <a:xfrm>
-            <a:off x="6492240" y="3657600"/>
-            <a:ext cx="3931920" cy="1554480"/>
-          </a:xfrm>
-          <a:prstGeom prst="roundRect">
-            <a:avLst/>
-          </a:prstGeom>
-          <a:solidFill>
-            <a:srgbClr val="EBF1DE"/>
-          </a:solidFill>
-          <a:ln>
-            <a:solidFill>
-              <a:srgbClr val="1F4E79"/>
-            </a:solidFill>
-          </a:ln>
-        </p:spPr>
-        <p:style>
-          <a:lnRef idx="1">
-            <a:schemeClr val="accent1"/>
-          </a:lnRef>
-          <a:fillRef idx="3">
-            <a:schemeClr val="accent1"/>
-          </a:fillRef>
-          <a:effectRef idx="2">
-            <a:schemeClr val="accent1"/>
-          </a:effectRef>
-          <a:fontRef idx="minor">
-            <a:schemeClr val="lt1"/>
-          </a:fontRef>
-        </p:style>
-        <p:txBody>
-          <a:bodyPr rtlCol="0" anchor="ctr"/>
-          <a:lstStyle/>
-          <a:p>
-            <a:pPr algn="ctr">
-              <a:defRPr sz="1600" b="1">
-                <a:solidFill>
-                  <a:srgbClr val="000000"/>
-                </a:solidFill>
-              </a:defRPr>
-            </a:pPr>
-            <a:r>
-              <a:t>신규 장비</a:t>
-            </a:r>
-            <a:br/>
-            <a:r>
-              <a:t>중간형 GPU 서버</a:t>
-            </a:r>
-            <a:br/>
-            <a:r>
-              <a:t>LLM / Owner / Reviewer / Workspace</a:t>
-            </a:r>
-          </a:p>
-        </p:txBody>
-      </p:sp>
-      <p:cxnSp>
-        <p:nvCxnSpPr>
-          <p:cNvPr id="7" name="Connector 6"/>
-          <p:cNvCxnSpPr/>
-          <p:nvPr/>
-        </p:nvCxnSpPr>
-        <p:spPr>
-          <a:xfrm flipV="1">
-            <a:off x="2651760" y="2103120"/>
-            <a:ext cx="457200" cy="548640"/>
-          </a:xfrm>
-          <a:prstGeom prst="line">
-            <a:avLst/>
-          </a:prstGeom>
-          <a:ln w="25400">
-            <a:solidFill>
-              <a:srgbClr val="1F4E79"/>
-            </a:solidFill>
-          </a:ln>
-        </p:spPr>
-        <p:style>
-          <a:lnRef idx="2">
-            <a:schemeClr val="accent1"/>
-          </a:lnRef>
-          <a:fillRef idx="0">
-            <a:schemeClr val="accent1"/>
-          </a:fillRef>
-          <a:effectRef idx="1">
-            <a:schemeClr val="accent1"/>
-          </a:effectRef>
-          <a:fontRef idx="minor">
-            <a:schemeClr val="tx1"/>
-          </a:fontRef>
-        </p:style>
-      </p:cxnSp>
-      <p:cxnSp>
-        <p:nvCxnSpPr>
-          <p:cNvPr id="8" name="Connector 7"/>
-          <p:cNvCxnSpPr/>
-          <p:nvPr/>
-        </p:nvCxnSpPr>
-        <p:spPr>
-          <a:xfrm flipH="1">
-            <a:off x="3291840" y="2651760"/>
-            <a:ext cx="1005840" cy="1188720"/>
-          </a:xfrm>
-          <a:prstGeom prst="line">
-            <a:avLst/>
-          </a:prstGeom>
-          <a:ln w="25400">
-            <a:solidFill>
-              <a:srgbClr val="1F4E79"/>
-            </a:solidFill>
-          </a:ln>
-        </p:spPr>
-        <p:style>
-          <a:lnRef idx="2">
-            <a:schemeClr val="accent1"/>
-          </a:lnRef>
-          <a:fillRef idx="0">
-            <a:schemeClr val="accent1"/>
-          </a:fillRef>
-          <a:effectRef idx="1">
-            <a:schemeClr val="accent1"/>
-          </a:effectRef>
-          <a:fontRef idx="minor">
-            <a:schemeClr val="tx1"/>
-          </a:fontRef>
-        </p:style>
-      </p:cxnSp>
-      <p:cxnSp>
-        <p:nvCxnSpPr>
-          <p:cNvPr id="9" name="Connector 8"/>
-          <p:cNvCxnSpPr/>
-          <p:nvPr/>
-        </p:nvCxnSpPr>
-        <p:spPr>
-          <a:xfrm>
-            <a:off x="5486400" y="2103120"/>
-            <a:ext cx="1005840" cy="1737360"/>
-          </a:xfrm>
-          <a:prstGeom prst="line">
-            <a:avLst/>
-          </a:prstGeom>
-          <a:ln w="25400">
-            <a:solidFill>
-              <a:srgbClr val="1F4E79"/>
-            </a:solidFill>
-          </a:ln>
-        </p:spPr>
-        <p:style>
-          <a:lnRef idx="2">
-            <a:schemeClr val="accent1"/>
-          </a:lnRef>
-          <a:fillRef idx="0">
-            <a:schemeClr val="accent1"/>
-          </a:fillRef>
-          <a:effectRef idx="1">
-            <a:schemeClr val="accent1"/>
-          </a:effectRef>
-          <a:fontRef idx="minor">
-            <a:schemeClr val="tx1"/>
-          </a:fontRef>
-        </p:style>
-      </p:cxnSp>
-      <p:cxnSp>
-        <p:nvCxnSpPr>
-          <p:cNvPr id="10" name="Connector 9"/>
-          <p:cNvCxnSpPr/>
-          <p:nvPr/>
-        </p:nvCxnSpPr>
-        <p:spPr>
-          <a:xfrm>
-            <a:off x="4572000" y="4526280"/>
-            <a:ext cx="1920240" cy="0"/>
-          </a:xfrm>
-          <a:prstGeom prst="line">
-            <a:avLst/>
-          </a:prstGeom>
-          <a:ln w="25400">
-            <a:solidFill>
-              <a:srgbClr val="1F4E79"/>
-            </a:solidFill>
-          </a:ln>
-        </p:spPr>
-        <p:style>
-          <a:lnRef idx="2">
-            <a:schemeClr val="accent1"/>
-          </a:lnRef>
-          <a:fillRef idx="0">
-            <a:schemeClr val="accent1"/>
-          </a:fillRef>
-          <a:effectRef idx="1">
-            <a:schemeClr val="accent1"/>
-          </a:effectRef>
-          <a:fontRef idx="minor">
-            <a:schemeClr val="tx1"/>
-          </a:fontRef>
-        </p:style>
-      </p:cxnSp>
+          <p:cNvPr id="2" name="Title 1"/>
+          <p:cNvSpPr>
+            <a:spLocks noGrp="1"/>
+          </p:cNvSpPr>
+          <p:nvPr>
+            <p:ph type="title"/>
+          </p:nvPr>
+        </p:nvSpPr>
+        <p:spPr/>
+        <p:txBody>
+          <a:bodyPr/>
+          <a:lstStyle/>
+          <a:p>
+            <a:r>
+              <a:t>1. 시스템 소개 (1/2)</a:t>
+            </a:r>
+          </a:p>
+        </p:txBody>
+      </p:sp>
+      <p:sp>
+        <p:nvSpPr>
+          <p:cNvPr id="3" name="Content Placeholder 2"/>
+          <p:cNvSpPr>
+            <a:spLocks noGrp="1"/>
+          </p:cNvSpPr>
+          <p:nvPr>
+            <p:ph idx="1"/>
+          </p:nvPr>
+        </p:nvSpPr>
+        <p:spPr/>
+        <p:txBody>
+          <a:bodyPr wrap="square"/>
+          <a:lstStyle/>
+          <a:p>
+            <a:pPr algn="l"/>
+            <a:r>
+              <a:rPr sz="1600"/>
+              <a:t>본 검토안은 사내 폐쇄망 내부에서 동작하는 **AI 기반 개발지원 시스템** 구축 제안입니다.</a:t>
+            </a:r>
+          </a:p>
+          <a:p>
+            <a:pPr algn="l"/>
+            <a:r>
+              <a:rPr sz="1600"/>
+              <a:t>구성 개념:</a:t>
+            </a:r>
+          </a:p>
+          <a:p>
+            <a:pPr algn="l"/>
+            <a:r>
+              <a:rPr sz="1600"/>
+              <a:t>**Owner AI**: 작업 브랜치에서 코드 수정, 테스트 실행, PR 생성 지원</a:t>
+            </a:r>
+          </a:p>
+          <a:p>
+            <a:pPr algn="l"/>
+            <a:r>
+              <a:rPr sz="1600"/>
+              <a:t>**Reviewer AI**: 변경사항 검토, 테스트 결과 확인, 승인/반려 판단 지원</a:t>
+            </a:r>
+          </a:p>
+          <a:p>
+            <a:pPr algn="l"/>
+            <a:r>
+              <a:rPr sz="1600"/>
+              <a:t>**Orchestrator**: 작업 배정, workspace 할당, 상태 관리, 감사 로그 저장</a:t>
+            </a:r>
+          </a:p>
+          <a:p>
+            <a:pPr algn="l"/>
+            <a:r>
+              <a:rPr sz="1600"/>
+              <a:t>**내부 Git / Jenkins 연동**: branch/PR 기준 빌드 및 테스트 자동화</a:t>
+            </a:r>
+          </a:p>
+          <a:p>
+            <a:pPr algn="l"/>
+            <a:r>
+              <a:rPr sz="1600"/>
+              <a:t>운영 전제:</a:t>
+            </a:r>
+          </a:p>
+          <a:p>
+            <a:pPr algn="l"/>
+            <a:r>
+              <a:rPr sz="1600"/>
+              <a:t>외부망 통신 없음</a:t>
+            </a:r>
+          </a:p>
+          <a:p>
+            <a:pPr algn="l"/>
+            <a:r>
+              <a:rPr sz="1600"/>
+              <a:t>소스 외부 유출 금지</a:t>
+            </a:r>
+          </a:p>
+          <a:p>
+            <a:pPr algn="l"/>
+            <a:r>
+              <a:rPr sz="1600"/>
+              <a:t>**기존 Git/Jenkins 장비 재사용**</a:t>
+            </a:r>
+          </a:p>
+        </p:txBody>
+      </p:sp>
+    </p:spTree>
+  </p:cSld>
+  <p:clrMapOvr>
+    <a:masterClrMapping/>
+  </p:clrMapOvr>
+</p:sld>
+</file>
+
+<file path=ppt/slides/slide20.xml><?xml version="1.0" encoding="utf-8"?>
+<p:sld xmlns:a="http://schemas.openxmlformats.org/drawingml/2006/main" xmlns:p="http://schemas.openxmlformats.org/presentationml/2006/main" xmlns:r="http://schemas.openxmlformats.org/officeDocument/2006/relationships">
+  <p:cSld>
+    <p:spTree>
+      <p:nvGrpSpPr>
+        <p:cNvPr id="1" name=""/>
+        <p:cNvGrpSpPr/>
+        <p:nvPr/>
+      </p:nvGrpSpPr>
+      <p:grpSpPr/>
+      <p:sp>
+        <p:nvSpPr>
+          <p:cNvPr id="2" name="Title 1"/>
+          <p:cNvSpPr>
+            <a:spLocks noGrp="1"/>
+          </p:cNvSpPr>
+          <p:nvPr>
+            <p:ph type="title"/>
+          </p:nvPr>
+        </p:nvSpPr>
+        <p:spPr/>
+        <p:txBody>
+          <a:bodyPr/>
+          <a:lstStyle/>
+          <a:p>
+            <a:r>
+              <a:t>10. 추진 일정표 (1/2)</a:t>
+            </a:r>
+          </a:p>
+        </p:txBody>
+      </p:sp>
+      <p:sp>
+        <p:nvSpPr>
+          <p:cNvPr id="3" name="Content Placeholder 2"/>
+          <p:cNvSpPr>
+            <a:spLocks noGrp="1"/>
+          </p:cNvSpPr>
+          <p:nvPr>
+            <p:ph idx="1"/>
+          </p:nvPr>
+        </p:nvSpPr>
+        <p:spPr/>
+        <p:txBody>
+          <a:bodyPr wrap="square"/>
+          <a:lstStyle/>
+          <a:p>
+            <a:pPr algn="l"/>
+            <a:r>
+              <a:rPr sz="1600"/>
+              <a:t>### 2주 MVP 일정표</a:t>
+            </a:r>
+          </a:p>
+          <a:p>
+            <a:pPr algn="l"/>
+            <a:r>
+              <a:rPr sz="1600"/>
+              <a:t>| 주차 | 작업 내용 | 산출물 |</a:t>
+            </a:r>
+          </a:p>
+          <a:p>
+            <a:pPr algn="l"/>
+            <a:r>
+              <a:rPr sz="1600"/>
+              <a:t>|---|---|---|</a:t>
+            </a:r>
+          </a:p>
+          <a:p>
+            <a:pPr algn="l"/>
+            <a:r>
+              <a:rPr sz="1600"/>
+              <a:t>| 1주차 | GPU 서버 준비, 내부 LLM 준비, 기존 Git/Jenkins 연동, Reviewer 기능 구현 | 리뷰 결과 생성 가능 |</a:t>
+            </a:r>
+          </a:p>
+          <a:p>
+            <a:pPr algn="l"/>
+            <a:r>
+              <a:rPr sz="1600"/>
+              <a:t>| 2주차 | Owner 기능 추가, branch 작업, PR 생성, 승인/반려 루프 연결 | 저장소 1개 기준 MVP 동작 |</a:t>
+            </a:r>
+          </a:p>
+          <a:p>
+            <a:pPr algn="l"/>
+            <a:r>
+              <a:rPr sz="1600"/>
+              <a:t>### 4주 확장 일정표</a:t>
+            </a:r>
+          </a:p>
+          <a:p>
+            <a:pPr algn="l"/>
+            <a:r>
+              <a:rPr sz="1600"/>
+              <a:t>| 주차 | 작업 내용 | 산출물 |</a:t>
+            </a:r>
+          </a:p>
+          <a:p>
+            <a:pPr algn="l"/>
+            <a:r>
+              <a:rPr sz="1600"/>
+              <a:t>|---|---|---|</a:t>
+            </a:r>
+          </a:p>
+          <a:p>
+            <a:pPr algn="l"/>
+            <a:r>
+              <a:rPr sz="1600"/>
+              <a:t>| 1주차 | GPU 서버 환경 정리, Git/Jenkins 연동 | 기본 인프라 준비 |</a:t>
+            </a:r>
+          </a:p>
+          <a:p>
+            <a:pPr algn="l"/>
+            <a:r>
+              <a:rPr sz="1600"/>
+              <a:t>| 2주차 | Reviewer 도입, diff/test 기반 리뷰 | Reviewer MVP |</a:t>
+            </a:r>
+          </a:p>
+        </p:txBody>
+      </p:sp>
+    </p:spTree>
+  </p:cSld>
+  <p:clrMapOvr>
+    <a:masterClrMapping/>
+  </p:clrMapOvr>
+</p:sld>
+</file>
+
+<file path=ppt/slides/slide21.xml><?xml version="1.0" encoding="utf-8"?>
+<p:sld xmlns:a="http://schemas.openxmlformats.org/drawingml/2006/main" xmlns:p="http://schemas.openxmlformats.org/presentationml/2006/main" xmlns:r="http://schemas.openxmlformats.org/officeDocument/2006/relationships">
+  <p:cSld>
+    <p:spTree>
+      <p:nvGrpSpPr>
+        <p:cNvPr id="1" name=""/>
+        <p:cNvGrpSpPr/>
+        <p:nvPr/>
+      </p:nvGrpSpPr>
+      <p:grpSpPr/>
+      <p:sp>
+        <p:nvSpPr>
+          <p:cNvPr id="2" name="Title 1"/>
+          <p:cNvSpPr>
+            <a:spLocks noGrp="1"/>
+          </p:cNvSpPr>
+          <p:nvPr>
+            <p:ph type="title"/>
+          </p:nvPr>
+        </p:nvSpPr>
+        <p:spPr/>
+        <p:txBody>
+          <a:bodyPr/>
+          <a:lstStyle/>
+          <a:p>
+            <a:r>
+              <a:t>10. 추진 일정표 (2/2)</a:t>
+            </a:r>
+          </a:p>
+        </p:txBody>
+      </p:sp>
+      <p:sp>
+        <p:nvSpPr>
+          <p:cNvPr id="3" name="Content Placeholder 2"/>
+          <p:cNvSpPr>
+            <a:spLocks noGrp="1"/>
+          </p:cNvSpPr>
+          <p:nvPr>
+            <p:ph idx="1"/>
+          </p:nvPr>
+        </p:nvSpPr>
+        <p:spPr/>
+        <p:txBody>
+          <a:bodyPr wrap="square"/>
+          <a:lstStyle/>
+          <a:p>
+            <a:pPr algn="l"/>
+            <a:r>
+              <a:rPr sz="1600"/>
+              <a:t>| 3주차 | Owner 도입, branch 수정/test/push/PR 생성 | Owner MVP |</a:t>
+            </a:r>
+          </a:p>
+          <a:p>
+            <a:pPr algn="l"/>
+            <a:r>
+              <a:rPr sz="1600"/>
+              <a:t>| 4주차 | workspace allocator, 감사 로그, 운영 화면 정리 | 팀 단위 시범 운영 가능 |</a:t>
+            </a:r>
+          </a:p>
+        </p:txBody>
+      </p:sp>
+    </p:spTree>
+  </p:cSld>
+  <p:clrMapOvr>
+    <a:masterClrMapping/>
+  </p:clrMapOvr>
+</p:sld>
+</file>
+
+<file path=ppt/slides/slide22.xml><?xml version="1.0" encoding="utf-8"?>
+<p:sld xmlns:a="http://schemas.openxmlformats.org/drawingml/2006/main" xmlns:p="http://schemas.openxmlformats.org/presentationml/2006/main" xmlns:r="http://schemas.openxmlformats.org/officeDocument/2006/relationships">
+  <p:cSld>
+    <p:spTree>
+      <p:nvGrpSpPr>
+        <p:cNvPr id="1" name=""/>
+        <p:cNvGrpSpPr/>
+        <p:nvPr/>
+      </p:nvGrpSpPr>
+      <p:grpSpPr/>
+      <p:sp>
+        <p:nvSpPr>
+          <p:cNvPr id="2" name="Title 1"/>
+          <p:cNvSpPr>
+            <a:spLocks noGrp="1"/>
+          </p:cNvSpPr>
+          <p:nvPr>
+            <p:ph type="title"/>
+          </p:nvPr>
+        </p:nvSpPr>
+        <p:spPr/>
+        <p:txBody>
+          <a:bodyPr/>
+          <a:lstStyle/>
+          <a:p>
+            <a:r>
+              <a:t>11. 요청 사항</a:t>
+            </a:r>
+          </a:p>
+        </p:txBody>
+      </p:sp>
+      <p:sp>
+        <p:nvSpPr>
+          <p:cNvPr id="3" name="Content Placeholder 2"/>
+          <p:cNvSpPr>
+            <a:spLocks noGrp="1"/>
+          </p:cNvSpPr>
+          <p:nvPr>
+            <p:ph idx="1"/>
+          </p:nvPr>
+        </p:nvSpPr>
+        <p:spPr/>
+        <p:txBody>
+          <a:bodyPr wrap="square"/>
+          <a:lstStyle/>
+          <a:p>
+            <a:pPr algn="l"/>
+            <a:r>
+              <a:rPr sz="1600"/>
+              <a:t>사내 폐쇄망 AI 개발지원 시스템 구축 가능 여부 검토</a:t>
+            </a:r>
+          </a:p>
+          <a:p>
+            <a:pPr algn="l"/>
+            <a:r>
+              <a:rPr sz="1600"/>
+              <a:t>**중간형 GPU 서버 1대 기준** 예산 검토</a:t>
+            </a:r>
+          </a:p>
+          <a:p>
+            <a:pPr algn="l"/>
+            <a:r>
+              <a:rPr sz="1600"/>
+              <a:t>저장소 1개 / 팀 1개 기준 MVP 시범 도입 검토</a:t>
+            </a:r>
+          </a:p>
+          <a:p>
+            <a:pPr algn="l"/>
+            <a:r>
+              <a:rPr sz="1600"/>
+              <a:t>기존 Git/Jenkins 장비 재사용 방식 협의</a:t>
+            </a:r>
+          </a:p>
+          <a:p>
+            <a:pPr algn="l"/>
+            <a:r>
+              <a:rPr sz="1600"/>
+              <a:t>운영 주체 지정</a:t>
+            </a:r>
+          </a:p>
+        </p:txBody>
+      </p:sp>
+    </p:spTree>
+  </p:cSld>
+  <p:clrMapOvr>
+    <a:masterClrMapping/>
+  </p:clrMapOvr>
+</p:sld>
+</file>
+
+<file path=ppt/slides/slide23.xml><?xml version="1.0" encoding="utf-8"?>
+<p:sld xmlns:a="http://schemas.openxmlformats.org/drawingml/2006/main" xmlns:p="http://schemas.openxmlformats.org/presentationml/2006/main" xmlns:r="http://schemas.openxmlformats.org/officeDocument/2006/relationships">
+  <p:cSld>
+    <p:spTree>
+      <p:nvGrpSpPr>
+        <p:cNvPr id="1" name=""/>
+        <p:cNvGrpSpPr/>
+        <p:nvPr/>
+      </p:nvGrpSpPr>
+      <p:grpSpPr/>
+      <p:sp>
+        <p:nvSpPr>
+          <p:cNvPr id="2" name="Title 1"/>
+          <p:cNvSpPr>
+            <a:spLocks noGrp="1"/>
+          </p:cNvSpPr>
+          <p:nvPr>
+            <p:ph type="title"/>
+          </p:nvPr>
+        </p:nvSpPr>
+        <p:spPr/>
+        <p:txBody>
+          <a:bodyPr/>
+          <a:lstStyle/>
+          <a:p>
+            <a:r>
+              <a:t>12. AI 모델/배포 방식 비교 (1/2)</a:t>
+            </a:r>
+          </a:p>
+        </p:txBody>
+      </p:sp>
+      <p:sp>
+        <p:nvSpPr>
+          <p:cNvPr id="3" name="Content Placeholder 2"/>
+          <p:cNvSpPr>
+            <a:spLocks noGrp="1"/>
+          </p:cNvSpPr>
+          <p:nvPr>
+            <p:ph idx="1"/>
+          </p:nvPr>
+        </p:nvSpPr>
+        <p:spPr/>
+        <p:txBody>
+          <a:bodyPr wrap="square"/>
+          <a:lstStyle/>
+          <a:p>
+            <a:pPr algn="l"/>
+            <a:r>
+              <a:rPr sz="1600"/>
+              <a:t>| 구분 | 장점 | 단점 | 완전 폐쇄망 적합성 | 권장 용도 |</a:t>
+            </a:r>
+          </a:p>
+          <a:p>
+            <a:pPr algn="l"/>
+            <a:r>
+              <a:rPr sz="1600"/>
+              <a:t>|---|---|---|---|---|</a:t>
+            </a:r>
+          </a:p>
+          <a:p>
+            <a:pPr algn="l"/>
+            <a:r>
+              <a:rPr sz="1600"/>
+              <a:t>| **Claude 계열** | 코드 이해/리뷰 품질이 높고 Owner/Reviewer 워크플로우와 궁합이 좋음 | 완전 폐쇄망 직접 설치는 현실적으로 어려우며 Bedrock/Vertex 같은 관리형 경로 필요 | **낮음** | 외부 연계형 또는 관리형 클라우드 환경 |</a:t>
+            </a:r>
+          </a:p>
+          <a:p>
+            <a:pPr algn="l"/>
+            <a:r>
+              <a:rPr sz="1600"/>
+              <a:t>| **GPT 계열** | 범용 추론, 도구 사용, 코드 생성 품질이 높음 | OpenAI/Azure API 전제가 필요하고 완전 air-gap에는 부적합 | **낮음** | 외부 연계형 또는 프라이빗 클라우드형 |</a:t>
+            </a:r>
+          </a:p>
+          <a:p>
+            <a:pPr algn="l"/>
+            <a:r>
+              <a:rPr sz="1600"/>
+              <a:t>| **Gemini 계열** | 긴 컨텍스트와 Google 생태계 연동이 강점 | Vertex AI 전제가 강하고 완전 폐쇄망 직접 설치는 어려움 | **낮음** | GCP 기반 외부 연계형 |</a:t>
+            </a:r>
+          </a:p>
+          <a:p>
+            <a:pPr algn="l"/>
+            <a:r>
+              <a:rPr sz="1600"/>
+              <a:t>| **오픈소스 로컬 모델** | 완전 폐쇄망 내부 설치 가능, 소스 외부 유출 통제에 유리 | 상용 최고급 모델 대비 품질/속도/튜닝 부담이 있음 | **높음** | 방산/폐쇄망 MVP 및 실사용 초기 단계 |</a:t>
+            </a:r>
+          </a:p>
+          <a:p>
+            <a:pPr algn="l"/>
+            <a:r>
+              <a:rPr sz="1600"/>
+              <a:t>현재 회사 조건(폐쇄망, 소스 외부 유출 금지)을 기준으로 하면, **완전 폐쇄망 MVP는 오픈소스 로컬 모델 기반이 현실적**입니다.</a:t>
+            </a:r>
+          </a:p>
+          <a:p>
+            <a:pPr algn="l"/>
+            <a:r>
+              <a:rPr sz="1600"/>
+              <a:t>### 권장 판단</a:t>
+            </a:r>
+          </a:p>
+          <a:p>
+            <a:pPr algn="l"/>
+            <a:r>
+              <a:rPr sz="1600"/>
+              <a:t>**보안/통제 최우선**: 오픈소스 로컬 모델 + 내부 RAG</a:t>
+            </a:r>
+          </a:p>
+          <a:p>
+            <a:pPr algn="l"/>
+            <a:r>
+              <a:rPr sz="1600"/>
+              <a:t>**최고급 모델 품질 최우선**: Claude/GPT/Gemini 관리형 경로 검토</a:t>
+            </a:r>
+          </a:p>
+        </p:txBody>
+      </p:sp>
+    </p:spTree>
+  </p:cSld>
+  <p:clrMapOvr>
+    <a:masterClrMapping/>
+  </p:clrMapOvr>
+</p:sld>
+</file>
+
+<file path=ppt/slides/slide24.xml><?xml version="1.0" encoding="utf-8"?>
+<p:sld xmlns:a="http://schemas.openxmlformats.org/drawingml/2006/main" xmlns:p="http://schemas.openxmlformats.org/presentationml/2006/main" xmlns:r="http://schemas.openxmlformats.org/officeDocument/2006/relationships">
+  <p:cSld>
+    <p:spTree>
+      <p:nvGrpSpPr>
+        <p:cNvPr id="1" name=""/>
+        <p:cNvGrpSpPr/>
+        <p:nvPr/>
+      </p:nvGrpSpPr>
+      <p:grpSpPr/>
+      <p:sp>
+        <p:nvSpPr>
+          <p:cNvPr id="2" name="Title 1"/>
+          <p:cNvSpPr>
+            <a:spLocks noGrp="1"/>
+          </p:cNvSpPr>
+          <p:nvPr>
+            <p:ph type="title"/>
+          </p:nvPr>
+        </p:nvSpPr>
+        <p:spPr/>
+        <p:txBody>
+          <a:bodyPr/>
+          <a:lstStyle/>
+          <a:p>
+            <a:r>
+              <a:t>12. AI 모델/배포 방식 비교 (2/2)</a:t>
+            </a:r>
+          </a:p>
+        </p:txBody>
+      </p:sp>
+      <p:sp>
+        <p:nvSpPr>
+          <p:cNvPr id="3" name="Content Placeholder 2"/>
+          <p:cNvSpPr>
+            <a:spLocks noGrp="1"/>
+          </p:cNvSpPr>
+          <p:nvPr>
+            <p:ph idx="1"/>
+          </p:nvPr>
+        </p:nvSpPr>
+        <p:spPr/>
+        <p:txBody>
+          <a:bodyPr wrap="square"/>
+          <a:lstStyle/>
+          <a:p>
+            <a:pPr algn="l"/>
+            <a:r>
+              <a:rPr sz="1600"/>
+              <a:t>**완전 폐쇄망과 Claude/GPT/Gemini 최고급 품질을 동시에 만족**시키는 것은 현실적으로 어렵습니다.</a:t>
+            </a:r>
+          </a:p>
+        </p:txBody>
+      </p:sp>
+    </p:spTree>
+  </p:cSld>
+  <p:clrMapOvr>
+    <a:masterClrMapping/>
+  </p:clrMapOvr>
+</p:sld>
+</file>
+
+<file path=ppt/slides/slide25.xml><?xml version="1.0" encoding="utf-8"?>
+<p:sld xmlns:a="http://schemas.openxmlformats.org/drawingml/2006/main" xmlns:p="http://schemas.openxmlformats.org/presentationml/2006/main" xmlns:r="http://schemas.openxmlformats.org/officeDocument/2006/relationships">
+  <p:cSld>
+    <p:spTree>
+      <p:nvGrpSpPr>
+        <p:cNvPr id="1" name=""/>
+        <p:cNvGrpSpPr/>
+        <p:nvPr/>
+      </p:nvGrpSpPr>
+      <p:grpSpPr/>
+      <p:sp>
+        <p:nvSpPr>
+          <p:cNvPr id="2" name="Title 1"/>
+          <p:cNvSpPr>
+            <a:spLocks noGrp="1"/>
+          </p:cNvSpPr>
+          <p:nvPr>
+            <p:ph type="title"/>
+          </p:nvPr>
+        </p:nvSpPr>
+        <p:spPr/>
+        <p:txBody>
+          <a:bodyPr/>
+          <a:lstStyle/>
+          <a:p>
+            <a:r>
+              <a:t>13. 방산 SW 적용 시 첫 번째 성공 사례 (1/3)</a:t>
+            </a:r>
+          </a:p>
+        </p:txBody>
+      </p:sp>
+      <p:sp>
+        <p:nvSpPr>
+          <p:cNvPr id="3" name="Content Placeholder 2"/>
+          <p:cNvSpPr>
+            <a:spLocks noGrp="1"/>
+          </p:cNvSpPr>
+          <p:nvPr>
+            <p:ph idx="1"/>
+          </p:nvPr>
+        </p:nvSpPr>
+        <p:spPr/>
+        <p:txBody>
+          <a:bodyPr wrap="square"/>
+          <a:lstStyle/>
+          <a:p>
+            <a:pPr algn="l"/>
+            <a:r>
+              <a:rPr sz="1600"/>
+              <a:t>방산 SW 환경에서는 범용 코드 생성보다 **규정/정적분석 대응 Reviewer**부터 시작하는 것이 더 현실적입니다.</a:t>
+            </a:r>
+          </a:p>
+          <a:p>
+            <a:pPr algn="l"/>
+            <a:r>
+              <a:rPr sz="1600"/>
+              <a:t>### 권장 1차 유즈케이스</a:t>
+            </a:r>
+          </a:p>
+          <a:p>
+            <a:pPr algn="l"/>
+            <a:r>
+              <a:rPr sz="1600"/>
+              <a:t>입력: **Sparrow structured finding**</a:t>
+            </a:r>
+          </a:p>
+          <a:p>
+            <a:pPr algn="l"/>
+            <a:r>
+              <a:rPr sz="1600"/>
+              <a:t>출력:</a:t>
+            </a:r>
+          </a:p>
+          <a:p>
+            <a:pPr algn="l"/>
+            <a:r>
+              <a:rPr sz="1600"/>
+              <a:t>관련 **MISRA / 6016F 조항 근거**</a:t>
+            </a:r>
+          </a:p>
+          <a:p>
+            <a:pPr algn="l"/>
+            <a:r>
+              <a:rPr sz="1600"/>
+              <a:t>원인 설명</a:t>
+            </a:r>
+          </a:p>
+          <a:p>
+            <a:pPr algn="l"/>
+            <a:r>
+              <a:rPr sz="1600"/>
+              <a:t>수정 가이드</a:t>
+            </a:r>
+          </a:p>
+          <a:p>
+            <a:pPr algn="l"/>
+            <a:r>
+              <a:rPr sz="1600"/>
+              <a:t>패치 초안</a:t>
+            </a:r>
+          </a:p>
+          <a:p>
+            <a:pPr algn="l"/>
+            <a:r>
+              <a:rPr sz="1600"/>
+              <a:t>### 이유</a:t>
+            </a:r>
+          </a:p>
+          <a:p>
+            <a:pPr algn="l"/>
+            <a:r>
+              <a:rPr sz="1600"/>
+              <a:t>자동 수정/자동 push보다 안전함</a:t>
+            </a:r>
+          </a:p>
+        </p:txBody>
+      </p:sp>
+    </p:spTree>
+  </p:cSld>
+  <p:clrMapOvr>
+    <a:masterClrMapping/>
+  </p:clrMapOvr>
+</p:sld>
+</file>
+
+<file path=ppt/slides/slide26.xml><?xml version="1.0" encoding="utf-8"?>
+<p:sld xmlns:a="http://schemas.openxmlformats.org/drawingml/2006/main" xmlns:p="http://schemas.openxmlformats.org/presentationml/2006/main" xmlns:r="http://schemas.openxmlformats.org/officeDocument/2006/relationships">
+  <p:cSld>
+    <p:spTree>
+      <p:nvGrpSpPr>
+        <p:cNvPr id="1" name=""/>
+        <p:cNvGrpSpPr/>
+        <p:nvPr/>
+      </p:nvGrpSpPr>
+      <p:grpSpPr/>
+      <p:sp>
+        <p:nvSpPr>
+          <p:cNvPr id="2" name="Title 1"/>
+          <p:cNvSpPr>
+            <a:spLocks noGrp="1"/>
+          </p:cNvSpPr>
+          <p:nvPr>
+            <p:ph type="title"/>
+          </p:nvPr>
+        </p:nvSpPr>
+        <p:spPr/>
+        <p:txBody>
+          <a:bodyPr/>
+          <a:lstStyle/>
+          <a:p>
+            <a:r>
+              <a:t>13. 방산 SW 적용 시 첫 번째 성공 사례 (2/3)</a:t>
+            </a:r>
+          </a:p>
+        </p:txBody>
+      </p:sp>
+      <p:sp>
+        <p:nvSpPr>
+          <p:cNvPr id="3" name="Content Placeholder 2"/>
+          <p:cNvSpPr>
+            <a:spLocks noGrp="1"/>
+          </p:cNvSpPr>
+          <p:nvPr>
+            <p:ph idx="1"/>
+          </p:nvPr>
+        </p:nvSpPr>
+        <p:spPr/>
+        <p:txBody>
+          <a:bodyPr wrap="square"/>
+          <a:lstStyle/>
+          <a:p>
+            <a:pPr algn="l"/>
+            <a:r>
+              <a:rPr sz="1600"/>
+              <a:t>평가 기준이 명확함</a:t>
+            </a:r>
+          </a:p>
+          <a:p>
+            <a:pPr algn="l"/>
+            <a:r>
+              <a:rPr sz="1600"/>
+              <a:t>규정 근거를 같이 제시할 수 있음</a:t>
+            </a:r>
+          </a:p>
+          <a:p>
+            <a:pPr algn="l"/>
+            <a:r>
+              <a:rPr sz="1600"/>
+              <a:t>사람 검토 흐름을 유지할 수 있음</a:t>
+            </a:r>
+          </a:p>
+          <a:p>
+            <a:pPr algn="l"/>
+            <a:r>
+              <a:rPr sz="1600"/>
+              <a:t>사내 규칙과 정적분석 대응 지식을 구조화하기 좋음</a:t>
+            </a:r>
+          </a:p>
+          <a:p>
+            <a:pPr algn="l"/>
+            <a:r>
+              <a:rPr sz="1600"/>
+              <a:t>### 권장 지식 주입 순서</a:t>
+            </a:r>
+          </a:p>
+          <a:p>
+            <a:pPr algn="l"/>
+            <a:r>
+              <a:rPr sz="1600"/>
+              <a:t>1. **RAG 우선**</a:t>
+            </a:r>
+          </a:p>
+          <a:p>
+            <a:pPr algn="l"/>
+            <a:r>
+              <a:rPr sz="1600"/>
+              <a:t>6016F, MISRA, Sparrow 가이드 문서 검색</a:t>
+            </a:r>
+          </a:p>
+          <a:p>
+            <a:pPr algn="l"/>
+            <a:r>
+              <a:rPr sz="1600"/>
+              <a:t>2. **코드 검색 연동**</a:t>
+            </a:r>
+          </a:p>
+          <a:p>
+            <a:pPr algn="l"/>
+            <a:r>
+              <a:rPr sz="1600"/>
+              <a:t>관련 모듈/심볼/수정 예시 검색</a:t>
+            </a:r>
+          </a:p>
+          <a:p>
+            <a:pPr algn="l"/>
+            <a:r>
+              <a:rPr sz="1600"/>
+              <a:t>3. **Fine-tuning은 후순위**</a:t>
+            </a:r>
+          </a:p>
+        </p:txBody>
+      </p:sp>
+    </p:spTree>
+  </p:cSld>
+  <p:clrMapOvr>
+    <a:masterClrMapping/>
+  </p:clrMapOvr>
+</p:sld>
+</file>
+
+<file path=ppt/slides/slide27.xml><?xml version="1.0" encoding="utf-8"?>
+<p:sld xmlns:a="http://schemas.openxmlformats.org/drawingml/2006/main" xmlns:p="http://schemas.openxmlformats.org/presentationml/2006/main" xmlns:r="http://schemas.openxmlformats.org/officeDocument/2006/relationships">
+  <p:cSld>
+    <p:spTree>
+      <p:nvGrpSpPr>
+        <p:cNvPr id="1" name=""/>
+        <p:cNvGrpSpPr/>
+        <p:nvPr/>
+      </p:nvGrpSpPr>
+      <p:grpSpPr/>
+      <p:sp>
+        <p:nvSpPr>
+          <p:cNvPr id="2" name="Title 1"/>
+          <p:cNvSpPr>
+            <a:spLocks noGrp="1"/>
+          </p:cNvSpPr>
+          <p:nvPr>
+            <p:ph type="title"/>
+          </p:nvPr>
+        </p:nvSpPr>
+        <p:spPr/>
+        <p:txBody>
+          <a:bodyPr/>
+          <a:lstStyle/>
+          <a:p>
+            <a:r>
+              <a:t>13. 방산 SW 적용 시 첫 번째 성공 사례 (3/3)</a:t>
+            </a:r>
+          </a:p>
+        </p:txBody>
+      </p:sp>
+      <p:sp>
+        <p:nvSpPr>
+          <p:cNvPr id="3" name="Content Placeholder 2"/>
+          <p:cNvSpPr>
+            <a:spLocks noGrp="1"/>
+          </p:cNvSpPr>
+          <p:nvPr>
+            <p:ph idx="1"/>
+          </p:nvPr>
+        </p:nvSpPr>
+        <p:spPr/>
+        <p:txBody>
+          <a:bodyPr wrap="square"/>
+          <a:lstStyle/>
+          <a:p>
+            <a:pPr algn="l"/>
+            <a:r>
+              <a:rPr sz="1600"/>
+              <a:t>소스 전체 미세조정보다 RAG와 예시 기반 보강이 먼저</a:t>
+            </a:r>
+          </a:p>
+        </p:txBody>
+      </p:sp>
+    </p:spTree>
+  </p:cSld>
+  <p:clrMapOvr>
+    <a:masterClrMapping/>
+  </p:clrMapOvr>
+</p:sld>
+</file>
+
+<file path=ppt/slides/slide28.xml><?xml version="1.0" encoding="utf-8"?>
+<p:sld xmlns:a="http://schemas.openxmlformats.org/drawingml/2006/main" xmlns:p="http://schemas.openxmlformats.org/presentationml/2006/main" xmlns:r="http://schemas.openxmlformats.org/officeDocument/2006/relationships">
+  <p:cSld>
+    <p:spTree>
+      <p:nvGrpSpPr>
+        <p:cNvPr id="1" name=""/>
+        <p:cNvGrpSpPr/>
+        <p:nvPr/>
+      </p:nvGrpSpPr>
+      <p:grpSpPr/>
+      <p:sp>
+        <p:nvSpPr>
+          <p:cNvPr id="2" name="Title 1"/>
+          <p:cNvSpPr>
+            <a:spLocks noGrp="1"/>
+          </p:cNvSpPr>
+          <p:nvPr>
+            <p:ph type="title"/>
+          </p:nvPr>
+        </p:nvSpPr>
+        <p:spPr/>
+        <p:txBody>
+          <a:bodyPr/>
+          <a:lstStyle/>
+          <a:p>
+            <a:r>
+              <a:t>14. "이곳과 동일한 수준" 구축 가능성 (1/2)</a:t>
+            </a:r>
+          </a:p>
+        </p:txBody>
+      </p:sp>
+      <p:sp>
+        <p:nvSpPr>
+          <p:cNvPr id="3" name="Content Placeholder 2"/>
+          <p:cNvSpPr>
+            <a:spLocks noGrp="1"/>
+          </p:cNvSpPr>
+          <p:nvPr>
+            <p:ph idx="1"/>
+          </p:nvPr>
+        </p:nvSpPr>
+        <p:spPr/>
+        <p:txBody>
+          <a:bodyPr wrap="square"/>
+          <a:lstStyle/>
+          <a:p>
+            <a:pPr algn="l"/>
+            <a:r>
+              <a:rPr sz="1600"/>
+              <a:t>현재 이곳과 같은 형태의 **Owner / Reviewer / Orchestrator 워크플로우 자체는 폐쇄망에서도 구축 가능**합니다.</a:t>
+            </a:r>
+          </a:p>
+          <a:p>
+            <a:pPr algn="l"/>
+            <a:r>
+              <a:rPr sz="1600"/>
+              <a:t>다만 차이는 명확합니다.</a:t>
+            </a:r>
+          </a:p>
+          <a:p>
+            <a:pPr algn="l"/>
+            <a:r>
+              <a:rPr sz="1600"/>
+              <a:t>### 가능한 것</a:t>
+            </a:r>
+          </a:p>
+          <a:p>
+            <a:pPr algn="l"/>
+            <a:r>
+              <a:rPr sz="1600"/>
+              <a:t>역할 분리형 AI 워크플로우</a:t>
+            </a:r>
+          </a:p>
+          <a:p>
+            <a:pPr algn="l"/>
+            <a:r>
+              <a:rPr sz="1600"/>
+              <a:t>내부 Git / Jenkins 연동</a:t>
+            </a:r>
+          </a:p>
+          <a:p>
+            <a:pPr algn="l"/>
+            <a:r>
+              <a:rPr sz="1600"/>
+              <a:t>branch / PR 기반 승인·반려 루프</a:t>
+            </a:r>
+          </a:p>
+          <a:p>
+            <a:pPr algn="l"/>
+            <a:r>
+              <a:rPr sz="1600"/>
+              <a:t>감사 로그 / workspace allocator 구조</a:t>
+            </a:r>
+          </a:p>
+          <a:p>
+            <a:pPr algn="l"/>
+            <a:r>
+              <a:rPr sz="1600"/>
+              <a:t>### 그대로 재현되기 어려운 것</a:t>
+            </a:r>
+          </a:p>
+          <a:p>
+            <a:pPr algn="l"/>
+            <a:r>
+              <a:rPr sz="1600"/>
+              <a:t>Claude / GPT / Gemini 최고급 모델 품질</a:t>
+            </a:r>
+          </a:p>
+          <a:p>
+            <a:pPr algn="l"/>
+            <a:r>
+              <a:rPr sz="1600"/>
+              <a:t>외부 초대형 인프라 기반의 빠른 응답 속도</a:t>
+            </a:r>
+          </a:p>
+        </p:txBody>
+      </p:sp>
+    </p:spTree>
+  </p:cSld>
+  <p:clrMapOvr>
+    <a:masterClrMapping/>
+  </p:clrMapOvr>
+</p:sld>
+</file>
+
+<file path=ppt/slides/slide29.xml><?xml version="1.0" encoding="utf-8"?>
+<p:sld xmlns:a="http://schemas.openxmlformats.org/drawingml/2006/main" xmlns:p="http://schemas.openxmlformats.org/presentationml/2006/main" xmlns:r="http://schemas.openxmlformats.org/officeDocument/2006/relationships">
+  <p:cSld>
+    <p:spTree>
+      <p:nvGrpSpPr>
+        <p:cNvPr id="1" name=""/>
+        <p:cNvGrpSpPr/>
+        <p:nvPr/>
+      </p:nvGrpSpPr>
+      <p:grpSpPr/>
+      <p:sp>
+        <p:nvSpPr>
+          <p:cNvPr id="2" name="Title 1"/>
+          <p:cNvSpPr>
+            <a:spLocks noGrp="1"/>
+          </p:cNvSpPr>
+          <p:nvPr>
+            <p:ph type="title"/>
+          </p:nvPr>
+        </p:nvSpPr>
+        <p:spPr/>
+        <p:txBody>
+          <a:bodyPr/>
+          <a:lstStyle/>
+          <a:p>
+            <a:r>
+              <a:t>14. "이곳과 동일한 수준" 구축 가능성 (2/2)</a:t>
+            </a:r>
+          </a:p>
+        </p:txBody>
+      </p:sp>
+      <p:sp>
+        <p:nvSpPr>
+          <p:cNvPr id="3" name="Content Placeholder 2"/>
+          <p:cNvSpPr>
+            <a:spLocks noGrp="1"/>
+          </p:cNvSpPr>
+          <p:nvPr>
+            <p:ph idx="1"/>
+          </p:nvPr>
+        </p:nvSpPr>
+        <p:spPr/>
+        <p:txBody>
+          <a:bodyPr wrap="square"/>
+          <a:lstStyle/>
+          <a:p>
+            <a:pPr algn="l"/>
+            <a:r>
+              <a:rPr sz="1600"/>
+              <a:t>대형 모델 다중 병렬 운용 여유</a:t>
+            </a:r>
+          </a:p>
+          <a:p>
+            <a:pPr algn="l"/>
+            <a:r>
+              <a:rPr sz="1600"/>
+              <a:t>즉,</a:t>
+            </a:r>
+          </a:p>
+          <a:p>
+            <a:pPr algn="l"/>
+            <a:r>
+              <a:rPr sz="1600"/>
+              <a:t>**구조와 운영 방식은 유사하게 구축 가능**</a:t>
+            </a:r>
+          </a:p>
+          <a:p>
+            <a:pPr algn="l"/>
+            <a:r>
+              <a:rPr sz="1600"/>
+              <a:t>**모델 품질은 동일 수준을 기대하면 안 됨**</a:t>
+            </a:r>
+          </a:p>
+          <a:p>
+            <a:pPr algn="l"/>
+            <a:r>
+              <a:rPr sz="1600"/>
+              <a:t>따라서 폐쇄망 구축안은 **"같은 구조, 다른 모델"**로 보는 것이 맞습니다.</a:t>
+            </a:r>
+          </a:p>
+        </p:txBody>
+      </p:sp>
     </p:spTree>
   </p:cSld>
   <p:clrMapOvr>
@@ -3691,148 +5377,176 @@
       <p:grpSpPr/>
       <p:sp>
         <p:nvSpPr>
-          <p:cNvPr id="2" name="TextBox 1"/>
-          <p:cNvSpPr txBox="1"/>
-          <p:nvPr/>
-        </p:nvSpPr>
-        <p:spPr>
-          <a:xfrm>
-            <a:off x="457200" y="274320"/>
-            <a:ext cx="11247120" cy="640080"/>
-          </a:xfrm>
-          <a:prstGeom prst="rect">
-            <a:avLst/>
-          </a:prstGeom>
-          <a:noFill/>
-        </p:spPr>
-        <p:txBody>
-          <a:bodyPr wrap="none">
-            <a:spAutoFit/>
-          </a:bodyPr>
-          <a:lstStyle/>
-          <a:p>
-            <a:pPr>
-              <a:defRPr sz="2600" b="1">
-                <a:solidFill>
-                  <a:srgbClr val="1F4E79"/>
-                </a:solidFill>
-              </a:defRPr>
-            </a:pPr>
-            <a:r>
-              <a:t>동작 흐름</a:t>
-            </a:r>
-          </a:p>
-        </p:txBody>
-      </p:sp>
-      <p:sp>
-        <p:nvSpPr>
-          <p:cNvPr id="3" name="TextBox 2"/>
-          <p:cNvSpPr txBox="1"/>
-          <p:nvPr/>
-        </p:nvSpPr>
-        <p:spPr>
-          <a:xfrm>
-            <a:off x="731520" y="1463040"/>
-            <a:ext cx="10515600" cy="4572000"/>
-          </a:xfrm>
-          <a:prstGeom prst="rect">
-            <a:avLst/>
-          </a:prstGeom>
-          <a:noFill/>
-        </p:spPr>
-        <p:txBody>
-          <a:bodyPr wrap="none">
-            <a:spAutoFit/>
-          </a:bodyPr>
-          <a:lstStyle/>
-          <a:p>
-            <a:pPr>
-              <a:spcAft>
-                <a:spcPts val="1000"/>
-              </a:spcAft>
-              <a:defRPr sz="2000">
-                <a:solidFill>
-                  <a:srgbClr val="000000"/>
-                </a:solidFill>
-              </a:defRPr>
-            </a:pPr>
-            <a:r>
-              <a:t>1. 개발자가 작업 생성</a:t>
-            </a:r>
-          </a:p>
-          <a:p>
-            <a:pPr>
-              <a:spcAft>
-                <a:spcPts val="1000"/>
-              </a:spcAft>
-              <a:defRPr sz="2000">
-                <a:solidFill>
-                  <a:srgbClr val="000000"/>
-                </a:solidFill>
-              </a:defRPr>
-            </a:pPr>
-            <a:r>
-              <a:t>2. 오케스트레이터가 workspace 할당</a:t>
-            </a:r>
-          </a:p>
-          <a:p>
-            <a:pPr>
-              <a:spcAft>
-                <a:spcPts val="1000"/>
-              </a:spcAft>
-              <a:defRPr sz="2000">
-                <a:solidFill>
-                  <a:srgbClr val="000000"/>
-                </a:solidFill>
-              </a:defRPr>
-            </a:pPr>
-            <a:r>
-              <a:t>3. Owner AI가 코드 수정 및 테스트 수행</a:t>
-            </a:r>
-          </a:p>
-          <a:p>
-            <a:pPr>
-              <a:spcAft>
-                <a:spcPts val="1000"/>
-              </a:spcAft>
-              <a:defRPr sz="2000">
-                <a:solidFill>
-                  <a:srgbClr val="000000"/>
-                </a:solidFill>
-              </a:defRPr>
-            </a:pPr>
-            <a:r>
-              <a:t>4. 내부 Git 브랜치 push</a:t>
-            </a:r>
-          </a:p>
-          <a:p>
-            <a:pPr>
-              <a:spcAft>
-                <a:spcPts val="1000"/>
-              </a:spcAft>
-              <a:defRPr sz="2000">
-                <a:solidFill>
-                  <a:srgbClr val="000000"/>
-                </a:solidFill>
-              </a:defRPr>
-            </a:pPr>
-            <a:r>
-              <a:t>5. Jenkins 빌드/테스트 실행</a:t>
-            </a:r>
-          </a:p>
-          <a:p>
-            <a:pPr>
-              <a:spcAft>
-                <a:spcPts val="1000"/>
-              </a:spcAft>
-              <a:defRPr sz="2000">
-                <a:solidFill>
-                  <a:srgbClr val="000000"/>
-                </a:solidFill>
-              </a:defRPr>
-            </a:pPr>
-            <a:r>
-              <a:t>6. Reviewer AI가 diff + 결과 검토 후 승인/반려</a:t>
+          <p:cNvPr id="2" name="Title 1"/>
+          <p:cNvSpPr>
+            <a:spLocks noGrp="1"/>
+          </p:cNvSpPr>
+          <p:nvPr>
+            <p:ph type="title"/>
+          </p:nvPr>
+        </p:nvSpPr>
+        <p:spPr/>
+        <p:txBody>
+          <a:bodyPr/>
+          <a:lstStyle/>
+          <a:p>
+            <a:r>
+              <a:t>1. 시스템 소개 (2/2)</a:t>
+            </a:r>
+          </a:p>
+        </p:txBody>
+      </p:sp>
+      <p:sp>
+        <p:nvSpPr>
+          <p:cNvPr id="3" name="Content Placeholder 2"/>
+          <p:cNvSpPr>
+            <a:spLocks noGrp="1"/>
+          </p:cNvSpPr>
+          <p:nvPr>
+            <p:ph idx="1"/>
+          </p:nvPr>
+        </p:nvSpPr>
+        <p:spPr/>
+        <p:txBody>
+          <a:bodyPr wrap="square"/>
+          <a:lstStyle/>
+          <a:p>
+            <a:pPr algn="l"/>
+            <a:r>
+              <a:rPr sz="1600"/>
+              <a:t>팀별 또는 개인별 workspace 분리 운영</a:t>
+            </a:r>
+          </a:p>
+          <a:p>
+            <a:pPr algn="l"/>
+            <a:r>
+              <a:rPr sz="1600"/>
+              <a:t>구축 작업은 **회사 내부 인력 수행** 전제</a:t>
+            </a:r>
+          </a:p>
+        </p:txBody>
+      </p:sp>
+    </p:spTree>
+  </p:cSld>
+  <p:clrMapOvr>
+    <a:masterClrMapping/>
+  </p:clrMapOvr>
+</p:sld>
+</file>
+
+<file path=ppt/slides/slide30.xml><?xml version="1.0" encoding="utf-8"?>
+<p:sld xmlns:a="http://schemas.openxmlformats.org/drawingml/2006/main" xmlns:p="http://schemas.openxmlformats.org/presentationml/2006/main" xmlns:r="http://schemas.openxmlformats.org/officeDocument/2006/relationships">
+  <p:cSld>
+    <p:spTree>
+      <p:nvGrpSpPr>
+        <p:cNvPr id="1" name=""/>
+        <p:cNvGrpSpPr/>
+        <p:nvPr/>
+      </p:nvGrpSpPr>
+      <p:grpSpPr/>
+      <p:sp>
+        <p:nvSpPr>
+          <p:cNvPr id="2" name="Title 1"/>
+          <p:cNvSpPr>
+            <a:spLocks noGrp="1"/>
+          </p:cNvSpPr>
+          <p:nvPr>
+            <p:ph type="title"/>
+          </p:nvPr>
+        </p:nvSpPr>
+        <p:spPr/>
+        <p:txBody>
+          <a:bodyPr/>
+          <a:lstStyle/>
+          <a:p>
+            <a:r>
+              <a:t>15. 결론</a:t>
+            </a:r>
+          </a:p>
+        </p:txBody>
+      </p:sp>
+      <p:sp>
+        <p:nvSpPr>
+          <p:cNvPr id="3" name="Content Placeholder 2"/>
+          <p:cNvSpPr>
+            <a:spLocks noGrp="1"/>
+          </p:cNvSpPr>
+          <p:nvPr>
+            <p:ph idx="1"/>
+          </p:nvPr>
+        </p:nvSpPr>
+        <p:spPr/>
+        <p:txBody>
+          <a:bodyPr wrap="square"/>
+          <a:lstStyle/>
+          <a:p>
+            <a:pPr algn="l"/>
+            <a:r>
+              <a:rPr sz="1600"/>
+              <a:t>당사 환경(폐쇄망, 소스 외부 반출 금지, 소규모 조직)을 고려할 때</a:t>
+            </a:r>
+          </a:p>
+          <a:p>
+            <a:pPr algn="l"/>
+            <a:r>
+              <a:rPr sz="1600"/>
+              <a:t>외부 AI 서비스가 아닌 **사내 폐쇄망 기반 AI 개발지원 시스템** 구축은 충분히 검토 가능한 방향입니다.</a:t>
+            </a:r>
+          </a:p>
+          <a:p>
+            <a:pPr algn="l"/>
+            <a:r>
+              <a:rPr sz="1600"/>
+              <a:t>다만 전사 확대 전에,</a:t>
+            </a:r>
+          </a:p>
+          <a:p>
+            <a:pPr algn="l"/>
+            <a:r>
+              <a:rPr sz="1600"/>
+              <a:t>**중간형 GPU 서버 1대**</a:t>
+            </a:r>
+          </a:p>
+          <a:p>
+            <a:pPr algn="l"/>
+            <a:r>
+              <a:rPr sz="1600"/>
+              <a:t>**기존 Git/Jenkins 장비 재사용**</a:t>
+            </a:r>
+          </a:p>
+          <a:p>
+            <a:pPr algn="l"/>
+            <a:r>
+              <a:rPr sz="1600"/>
+              <a:t>저장소 1개</a:t>
+            </a:r>
+          </a:p>
+          <a:p>
+            <a:pPr algn="l"/>
+            <a:r>
+              <a:rPr sz="1600"/>
+              <a:t>팀 1개</a:t>
+            </a:r>
+          </a:p>
+          <a:p>
+            <a:pPr algn="l"/>
+            <a:r>
+              <a:rPr sz="1600"/>
+              <a:t>Reviewer/Owner 역할 분리</a:t>
+            </a:r>
+          </a:p>
+          <a:p>
+            <a:pPr algn="l"/>
+            <a:r>
+              <a:rPr sz="1600"/>
+              <a:t>branch/PR 기반 운영</a:t>
+            </a:r>
+          </a:p>
+          <a:p>
+            <a:pPr algn="l"/>
+            <a:r>
+              <a:rPr sz="1600"/>
+              <a:t>형태의 **소규모 MVP부터 시작**하는 것이 가장 현실적이고 안전한 방법입니다.</a:t>
             </a:r>
           </a:p>
         </p:txBody>
@@ -3857,479 +5571,97 @@
       <p:grpSpPr/>
       <p:sp>
         <p:nvSpPr>
-          <p:cNvPr id="2" name="TextBox 1"/>
-          <p:cNvSpPr txBox="1"/>
-          <p:nvPr/>
-        </p:nvSpPr>
-        <p:spPr>
-          <a:xfrm>
-            <a:off x="457200" y="274320"/>
-            <a:ext cx="11247120" cy="640080"/>
-          </a:xfrm>
-          <a:prstGeom prst="rect">
-            <a:avLst/>
-          </a:prstGeom>
-          <a:noFill/>
-        </p:spPr>
-        <p:txBody>
-          <a:bodyPr wrap="none">
-            <a:spAutoFit/>
-          </a:bodyPr>
-          <a:lstStyle/>
-          <a:p>
-            <a:pPr>
-              <a:defRPr sz="2600" b="1">
-                <a:solidFill>
-                  <a:srgbClr val="1F4E79"/>
-                </a:solidFill>
-              </a:defRPr>
-            </a:pPr>
-            <a:r>
-              <a:t>비용 요약 (최신 기준)</a:t>
-            </a:r>
-          </a:p>
-        </p:txBody>
-      </p:sp>
-      <p:graphicFrame>
-        <p:nvGraphicFramePr>
-          <p:cNvPr id="3" name="Table 2"/>
-          <p:cNvGraphicFramePr>
-            <a:graphicFrameLocks noGrp="1"/>
-          </p:cNvGraphicFramePr>
-          <p:nvPr/>
-        </p:nvGraphicFramePr>
-        <p:xfrm>
-          <a:off x="457200" y="1463040"/>
-          <a:ext cx="11247120" cy="4114800"/>
-        </p:xfrm>
-        <a:graphic>
-          <a:graphicData uri="http://schemas.openxmlformats.org/drawingml/2006/table">
-            <a:tbl>
-              <a:tblPr firstRow="1" bandRow="1">
-                <a:tableStyleId>{5C22544A-7EE6-4342-B048-85BDC9FD1C3A}</a:tableStyleId>
-              </a:tblPr>
-              <a:tblGrid>
-                <a:gridCol w="3749040"/>
-                <a:gridCol w="3749040"/>
-                <a:gridCol w="3749040"/>
-              </a:tblGrid>
-              <a:tr h="587828">
-                <a:tc>
-                  <a:txBody>
-                    <a:bodyPr/>
-                    <a:lstStyle/>
-                    <a:p>
-                      <a:pPr algn="ctr">
-                        <a:defRPr sz="1400" b="1"/>
-                      </a:pPr>
-                      <a:r>
-                        <a:t>항목</a:t>
-                      </a:r>
-                    </a:p>
-                  </a:txBody>
-                  <a:tcPr>
-                    <a:solidFill>
-                      <a:srgbClr val="E6E6E6"/>
-                    </a:solidFill>
-                  </a:tcPr>
-                </a:tc>
-                <a:tc>
-                  <a:txBody>
-                    <a:bodyPr/>
-                    <a:lstStyle/>
-                    <a:p>
-                      <a:pPr algn="ctr">
-                        <a:defRPr sz="1400" b="1"/>
-                      </a:pPr>
-                      <a:r>
-                        <a:t>예상 비용</a:t>
-                      </a:r>
-                    </a:p>
-                  </a:txBody>
-                  <a:tcPr>
-                    <a:solidFill>
-                      <a:srgbClr val="E6E6E6"/>
-                    </a:solidFill>
-                  </a:tcPr>
-                </a:tc>
-                <a:tc>
-                  <a:txBody>
-                    <a:bodyPr/>
-                    <a:lstStyle/>
-                    <a:p>
-                      <a:pPr algn="ctr">
-                        <a:defRPr sz="1400" b="1"/>
-                      </a:pPr>
-                      <a:r>
-                        <a:t>비고</a:t>
-                      </a:r>
-                    </a:p>
-                  </a:txBody>
-                  <a:tcPr>
-                    <a:solidFill>
-                      <a:srgbClr val="E6E6E6"/>
-                    </a:solidFill>
-                  </a:tcPr>
-                </a:tc>
-              </a:tr>
-              <a:tr h="587828">
-                <a:tc>
-                  <a:txBody>
-                    <a:bodyPr/>
-                    <a:lstStyle/>
-                    <a:p>
-                      <a:pPr algn="l">
-                        <a:defRPr sz="1300" b="0"/>
-                      </a:pPr>
-                      <a:r>
-                        <a:t>GPU 서버</a:t>
-                      </a:r>
-                    </a:p>
-                  </a:txBody>
-                  <a:tcPr>
-                    <a:solidFill>
-                      <a:srgbClr val="FFFFFF"/>
-                    </a:solidFill>
-                  </a:tcPr>
-                </a:tc>
-                <a:tc>
-                  <a:txBody>
-                    <a:bodyPr/>
-                    <a:lstStyle/>
-                    <a:p>
-                      <a:pPr algn="l">
-                        <a:defRPr sz="1300" b="0"/>
-                      </a:pPr>
-                      <a:r>
-                        <a:t>4,000만 ~ 6,500만원</a:t>
-                      </a:r>
-                    </a:p>
-                  </a:txBody>
-                  <a:tcPr>
-                    <a:solidFill>
-                      <a:srgbClr val="FFFFFF"/>
-                    </a:solidFill>
-                  </a:tcPr>
-                </a:tc>
-                <a:tc>
-                  <a:txBody>
-                    <a:bodyPr/>
-                    <a:lstStyle/>
-                    <a:p>
-                      <a:pPr algn="l">
-                        <a:defRPr sz="1300" b="0"/>
-                      </a:pPr>
-                      <a:r>
-                        <a:t>중간형 GPU 서버 1대</a:t>
-                      </a:r>
-                    </a:p>
-                  </a:txBody>
-                  <a:tcPr>
-                    <a:solidFill>
-                      <a:srgbClr val="FFFFFF"/>
-                    </a:solidFill>
-                  </a:tcPr>
-                </a:tc>
-              </a:tr>
-              <a:tr h="587828">
-                <a:tc>
-                  <a:txBody>
-                    <a:bodyPr/>
-                    <a:lstStyle/>
-                    <a:p>
-                      <a:pPr algn="l">
-                        <a:defRPr sz="1300" b="0"/>
-                      </a:pPr>
-                      <a:r>
-                        <a:t>스토리지/백업/UPS</a:t>
-                      </a:r>
-                    </a:p>
-                  </a:txBody>
-                  <a:tcPr>
-                    <a:solidFill>
-                      <a:srgbClr val="FFFFFF"/>
-                    </a:solidFill>
-                  </a:tcPr>
-                </a:tc>
-                <a:tc>
-                  <a:txBody>
-                    <a:bodyPr/>
-                    <a:lstStyle/>
-                    <a:p>
-                      <a:pPr algn="l">
-                        <a:defRPr sz="1300" b="0"/>
-                      </a:pPr>
-                      <a:r>
-                        <a:t>300만 ~ 1,200만원</a:t>
-                      </a:r>
-                    </a:p>
-                  </a:txBody>
-                  <a:tcPr>
-                    <a:solidFill>
-                      <a:srgbClr val="FFFFFF"/>
-                    </a:solidFill>
-                  </a:tcPr>
-                </a:tc>
-                <a:tc>
-                  <a:txBody>
-                    <a:bodyPr/>
-                    <a:lstStyle/>
-                    <a:p>
-                      <a:pPr algn="l">
-                        <a:defRPr sz="1300" b="0"/>
-                      </a:pPr>
-                      <a:r>
-                        <a:t>NAS, 백업, UPS</a:t>
-                      </a:r>
-                    </a:p>
-                  </a:txBody>
-                  <a:tcPr>
-                    <a:solidFill>
-                      <a:srgbClr val="FFFFFF"/>
-                    </a:solidFill>
-                  </a:tcPr>
-                </a:tc>
-              </a:tr>
-              <a:tr h="587828">
-                <a:tc>
-                  <a:txBody>
-                    <a:bodyPr/>
-                    <a:lstStyle/>
-                    <a:p>
-                      <a:pPr algn="l">
-                        <a:defRPr sz="1300" b="0"/>
-                      </a:pPr>
-                      <a:r>
-                        <a:t>초기 장비비 합계</a:t>
-                      </a:r>
-                    </a:p>
-                  </a:txBody>
-                  <a:tcPr>
-                    <a:solidFill>
-                      <a:srgbClr val="FFFFFF"/>
-                    </a:solidFill>
-                  </a:tcPr>
-                </a:tc>
-                <a:tc>
-                  <a:txBody>
-                    <a:bodyPr/>
-                    <a:lstStyle/>
-                    <a:p>
-                      <a:pPr algn="l">
-                        <a:defRPr sz="1300" b="0"/>
-                      </a:pPr>
-                      <a:r>
-                        <a:t>4,300만 ~ 7,700만원</a:t>
-                      </a:r>
-                    </a:p>
-                  </a:txBody>
-                  <a:tcPr>
-                    <a:solidFill>
-                      <a:srgbClr val="FFFFFF"/>
-                    </a:solidFill>
-                  </a:tcPr>
-                </a:tc>
-                <a:tc>
-                  <a:txBody>
-                    <a:bodyPr/>
-                    <a:lstStyle/>
-                    <a:p>
-                      <a:pPr algn="l">
-                        <a:defRPr sz="1300" b="0"/>
-                      </a:pPr>
-                      <a:r>
-                        <a:t>인건비 제외 / Git·Jenkins 재사용</a:t>
-                      </a:r>
-                    </a:p>
-                  </a:txBody>
-                  <a:tcPr>
-                    <a:solidFill>
-                      <a:srgbClr val="FFFFFF"/>
-                    </a:solidFill>
-                  </a:tcPr>
-                </a:tc>
-              </a:tr>
-              <a:tr h="587828">
-                <a:tc>
-                  <a:txBody>
-                    <a:bodyPr/>
-                    <a:lstStyle/>
-                    <a:p>
-                      <a:pPr algn="l">
-                        <a:defRPr sz="1300" b="0"/>
-                      </a:pPr>
-                      <a:r>
-                        <a:t>월간 운영비</a:t>
-                      </a:r>
-                    </a:p>
-                  </a:txBody>
-                  <a:tcPr>
-                    <a:solidFill>
-                      <a:srgbClr val="FFFFFF"/>
-                    </a:solidFill>
-                  </a:tcPr>
-                </a:tc>
-                <a:tc>
-                  <a:txBody>
-                    <a:bodyPr/>
-                    <a:lstStyle/>
-                    <a:p>
-                      <a:pPr algn="l">
-                        <a:defRPr sz="1300" b="0"/>
-                      </a:pPr>
-                      <a:r>
-                        <a:t>100만 ~ 220만원</a:t>
-                      </a:r>
-                    </a:p>
-                  </a:txBody>
-                  <a:tcPr>
-                    <a:solidFill>
-                      <a:srgbClr val="FFFFFF"/>
-                    </a:solidFill>
-                  </a:tcPr>
-                </a:tc>
-                <a:tc>
-                  <a:txBody>
-                    <a:bodyPr/>
-                    <a:lstStyle/>
-                    <a:p>
-                      <a:pPr algn="l">
-                        <a:defRPr sz="1300" b="0"/>
-                      </a:pPr>
-                      <a:r>
-                        <a:t>인프라/실비 운영비</a:t>
-                      </a:r>
-                    </a:p>
-                  </a:txBody>
-                  <a:tcPr>
-                    <a:solidFill>
-                      <a:srgbClr val="FFFFFF"/>
-                    </a:solidFill>
-                  </a:tcPr>
-                </a:tc>
-              </a:tr>
-              <a:tr h="587828">
-                <a:tc>
-                  <a:txBody>
-                    <a:bodyPr/>
-                    <a:lstStyle/>
-                    <a:p>
-                      <a:pPr algn="l">
-                        <a:defRPr sz="1300" b="0"/>
-                      </a:pPr>
-                      <a:r>
-                        <a:t>연간 운영비</a:t>
-                      </a:r>
-                    </a:p>
-                  </a:txBody>
-                  <a:tcPr>
-                    <a:solidFill>
-                      <a:srgbClr val="FFFFFF"/>
-                    </a:solidFill>
-                  </a:tcPr>
-                </a:tc>
-                <a:tc>
-                  <a:txBody>
-                    <a:bodyPr/>
-                    <a:lstStyle/>
-                    <a:p>
-                      <a:pPr algn="l">
-                        <a:defRPr sz="1300" b="0"/>
-                      </a:pPr>
-                      <a:r>
-                        <a:t>1,200만 ~ 2,640만원</a:t>
-                      </a:r>
-                    </a:p>
-                  </a:txBody>
-                  <a:tcPr>
-                    <a:solidFill>
-                      <a:srgbClr val="FFFFFF"/>
-                    </a:solidFill>
-                  </a:tcPr>
-                </a:tc>
-                <a:tc>
-                  <a:txBody>
-                    <a:bodyPr/>
-                    <a:lstStyle/>
-                    <a:p>
-                      <a:pPr algn="l">
-                        <a:defRPr sz="1300" b="0"/>
-                      </a:pPr>
-                      <a:r>
-                        <a:t>인프라/실비 운영비</a:t>
-                      </a:r>
-                    </a:p>
-                  </a:txBody>
-                  <a:tcPr>
-                    <a:solidFill>
-                      <a:srgbClr val="FFFFFF"/>
-                    </a:solidFill>
-                  </a:tcPr>
-                </a:tc>
-              </a:tr>
-              <a:tr h="587832">
-                <a:tc>
-                  <a:txBody>
-                    <a:bodyPr/>
-                    <a:lstStyle/>
-                    <a:p>
-                      <a:pPr algn="l">
-                        <a:defRPr sz="1300" b="0"/>
-                      </a:pPr>
-                      <a:r>
-                        <a:t>운영관리 제외 시</a:t>
-                      </a:r>
-                    </a:p>
-                  </a:txBody>
-                  <a:tcPr>
-                    <a:solidFill>
-                      <a:srgbClr val="FFFFFF"/>
-                    </a:solidFill>
-                  </a:tcPr>
-                </a:tc>
-                <a:tc>
-                  <a:txBody>
-                    <a:bodyPr/>
-                    <a:lstStyle/>
-                    <a:p>
-                      <a:pPr algn="l">
-                        <a:defRPr sz="1300" b="0"/>
-                      </a:pPr>
-                      <a:r>
-                        <a:t>월 50만 ~ 120만원</a:t>
-                      </a:r>
-                    </a:p>
-                  </a:txBody>
-                  <a:tcPr>
-                    <a:solidFill>
-                      <a:srgbClr val="FFFFFF"/>
-                    </a:solidFill>
-                  </a:tcPr>
-                </a:tc>
-                <a:tc>
-                  <a:txBody>
-                    <a:bodyPr/>
-                    <a:lstStyle/>
-                    <a:p>
-                      <a:pPr algn="l">
-                        <a:defRPr sz="1300" b="0"/>
-                      </a:pPr>
-                      <a:r>
-                        <a:t>실비 기준 하한</a:t>
-                      </a:r>
-                    </a:p>
-                  </a:txBody>
-                  <a:tcPr>
-                    <a:solidFill>
-                      <a:srgbClr val="FFFFFF"/>
-                    </a:solidFill>
-                  </a:tcPr>
-                </a:tc>
-              </a:tr>
-            </a:tbl>
-          </a:graphicData>
-        </a:graphic>
-      </p:graphicFrame>
+          <p:cNvPr id="2" name="Title 1"/>
+          <p:cNvSpPr>
+            <a:spLocks noGrp="1"/>
+          </p:cNvSpPr>
+          <p:nvPr>
+            <p:ph type="title"/>
+          </p:nvPr>
+        </p:nvSpPr>
+        <p:spPr/>
+        <p:txBody>
+          <a:bodyPr/>
+          <a:lstStyle/>
+          <a:p>
+            <a:r>
+              <a:t>2. 시스템 시각화</a:t>
+            </a:r>
+          </a:p>
+        </p:txBody>
+      </p:sp>
+      <p:sp>
+        <p:nvSpPr>
+          <p:cNvPr id="3" name="Content Placeholder 2"/>
+          <p:cNvSpPr>
+            <a:spLocks noGrp="1"/>
+          </p:cNvSpPr>
+          <p:nvPr>
+            <p:ph idx="1"/>
+          </p:nvPr>
+        </p:nvSpPr>
+        <p:spPr/>
+        <p:txBody>
+          <a:bodyPr wrap="square"/>
+          <a:lstStyle/>
+          <a:p>
+            <a:pPr algn="l"/>
+            <a:r>
+              <a:rPr sz="1600"/>
+              <a:t>### 2-1. 전체 구성도</a:t>
+            </a:r>
+          </a:p>
+          <a:p>
+            <a:pPr algn="l"/>
+            <a:r>
+              <a:rPr sz="1600"/>
+              <a:t>[Mermaid 다이어그램은 GitHub 이슈 본문 참조]</a:t>
+            </a:r>
+          </a:p>
+          <a:p>
+            <a:pPr algn="l"/>
+            <a:r>
+              <a:rPr sz="1600"/>
+              <a:t>### 2-2. 권장 인프라 구성</a:t>
+            </a:r>
+          </a:p>
+          <a:p>
+            <a:pPr algn="l"/>
+            <a:r>
+              <a:rPr sz="1600"/>
+              <a:t>[Mermaid 다이어그램은 GitHub 이슈 본문 참조]</a:t>
+            </a:r>
+          </a:p>
+          <a:p>
+            <a:pPr algn="l"/>
+            <a:r>
+              <a:rPr sz="1600"/>
+              <a:t>### 2-3. 실제 동작 흐름</a:t>
+            </a:r>
+          </a:p>
+          <a:p>
+            <a:pPr algn="l"/>
+            <a:r>
+              <a:rPr sz="1600"/>
+              <a:t>[Mermaid 다이어그램은 GitHub 이슈 본문 참조]</a:t>
+            </a:r>
+          </a:p>
+          <a:p>
+            <a:pPr algn="l"/>
+            <a:r>
+              <a:rPr sz="1600"/>
+              <a:t>### 2-4. 역할 분리 구조</a:t>
+            </a:r>
+          </a:p>
+          <a:p>
+            <a:pPr algn="l"/>
+            <a:r>
+              <a:rPr sz="1600"/>
+              <a:t>[Mermaid 다이어그램은 GitHub 이슈 본문 참조]</a:t>
+            </a:r>
+          </a:p>
+        </p:txBody>
+      </p:sp>
     </p:spTree>
   </p:cSld>
   <p:clrMapOvr>
@@ -4350,263 +5682,107 @@
       <p:grpSpPr/>
       <p:sp>
         <p:nvSpPr>
-          <p:cNvPr id="2" name="TextBox 1"/>
-          <p:cNvSpPr txBox="1"/>
-          <p:nvPr/>
-        </p:nvSpPr>
-        <p:spPr>
-          <a:xfrm>
-            <a:off x="457200" y="274320"/>
-            <a:ext cx="11247120" cy="640080"/>
-          </a:xfrm>
-          <a:prstGeom prst="rect">
-            <a:avLst/>
-          </a:prstGeom>
-          <a:noFill/>
-        </p:spPr>
-        <p:txBody>
-          <a:bodyPr wrap="none">
-            <a:spAutoFit/>
-          </a:bodyPr>
-          <a:lstStyle/>
-          <a:p>
-            <a:pPr>
-              <a:defRPr sz="2600" b="1">
-                <a:solidFill>
-                  <a:srgbClr val="1F4E79"/>
-                </a:solidFill>
-              </a:defRPr>
-            </a:pPr>
-            <a:r>
-              <a:t>장점 / 리스크</a:t>
-            </a:r>
-          </a:p>
-        </p:txBody>
-      </p:sp>
-      <p:sp>
-        <p:nvSpPr>
-          <p:cNvPr id="3" name="Rounded Rectangle 2"/>
-          <p:cNvSpPr/>
-          <p:nvPr/>
-        </p:nvSpPr>
-        <p:spPr>
-          <a:xfrm>
-            <a:off x="457200" y="1371600"/>
-            <a:ext cx="5120640" cy="4297680"/>
-          </a:xfrm>
-          <a:prstGeom prst="roundRect">
-            <a:avLst/>
-          </a:prstGeom>
-          <a:solidFill>
-            <a:srgbClr val="C6EFCE"/>
-          </a:solidFill>
-          <a:ln>
-            <a:solidFill>
-              <a:srgbClr val="1F4E79"/>
-            </a:solidFill>
-          </a:ln>
-        </p:spPr>
-        <p:style>
-          <a:lnRef idx="1">
-            <a:schemeClr val="accent1"/>
-          </a:lnRef>
-          <a:fillRef idx="3">
-            <a:schemeClr val="accent1"/>
-          </a:fillRef>
-          <a:effectRef idx="2">
-            <a:schemeClr val="accent1"/>
-          </a:effectRef>
-          <a:fontRef idx="minor">
-            <a:schemeClr val="lt1"/>
-          </a:fontRef>
-        </p:style>
-        <p:txBody>
-          <a:bodyPr rtlCol="0" anchor="ctr"/>
-          <a:lstStyle/>
-          <a:p>
-            <a:pPr algn="ctr">
-              <a:defRPr sz="2000" b="1">
-                <a:solidFill>
-                  <a:srgbClr val="1F4E79"/>
-                </a:solidFill>
-              </a:defRPr>
-            </a:pPr>
-            <a:r>
-              <a:t>장점</a:t>
-            </a:r>
-          </a:p>
-          <a:p>
-            <a:pPr>
-              <a:spcAft>
-                <a:spcPts val="600"/>
-              </a:spcAft>
-              <a:defRPr sz="1600">
-                <a:solidFill>
-                  <a:srgbClr val="000000"/>
-                </a:solidFill>
-              </a:defRPr>
-            </a:pPr>
-            <a:r>
-              <a:t>소스 외부 유출 위험 최소화</a:t>
-            </a:r>
-          </a:p>
-          <a:p>
-            <a:pPr>
-              <a:spcAft>
-                <a:spcPts val="600"/>
-              </a:spcAft>
-              <a:defRPr sz="1600">
-                <a:solidFill>
-                  <a:srgbClr val="000000"/>
-                </a:solidFill>
-              </a:defRPr>
-            </a:pPr>
-            <a:r>
-              <a:t>기존 Git/Jenkins 활용으로 초기비용 절감</a:t>
-            </a:r>
-          </a:p>
-          <a:p>
-            <a:pPr>
-              <a:spcAft>
-                <a:spcPts val="600"/>
-              </a:spcAft>
-              <a:defRPr sz="1600">
-                <a:solidFill>
-                  <a:srgbClr val="000000"/>
-                </a:solidFill>
-              </a:defRPr>
-            </a:pPr>
-            <a:r>
-              <a:t>반복 리뷰/테스트 작업 감소</a:t>
-            </a:r>
-          </a:p>
-          <a:p>
-            <a:pPr>
-              <a:spcAft>
-                <a:spcPts val="600"/>
-              </a:spcAft>
-              <a:defRPr sz="1600">
-                <a:solidFill>
-                  <a:srgbClr val="000000"/>
-                </a:solidFill>
-              </a:defRPr>
-            </a:pPr>
-            <a:r>
-              <a:t>branch/PR 기반 통제 가능</a:t>
-            </a:r>
-          </a:p>
-        </p:txBody>
-      </p:sp>
-      <p:sp>
-        <p:nvSpPr>
-          <p:cNvPr id="4" name="Rounded Rectangle 3"/>
-          <p:cNvSpPr/>
-          <p:nvPr/>
-        </p:nvSpPr>
-        <p:spPr>
-          <a:xfrm>
-            <a:off x="6035040" y="1371600"/>
-            <a:ext cx="5120640" cy="4297680"/>
-          </a:xfrm>
-          <a:prstGeom prst="roundRect">
-            <a:avLst/>
-          </a:prstGeom>
-          <a:solidFill>
-            <a:srgbClr val="FFC7CE"/>
-          </a:solidFill>
-          <a:ln>
-            <a:solidFill>
-              <a:srgbClr val="1F4E79"/>
-            </a:solidFill>
-          </a:ln>
-        </p:spPr>
-        <p:style>
-          <a:lnRef idx="1">
-            <a:schemeClr val="accent1"/>
-          </a:lnRef>
-          <a:fillRef idx="3">
-            <a:schemeClr val="accent1"/>
-          </a:fillRef>
-          <a:effectRef idx="2">
-            <a:schemeClr val="accent1"/>
-          </a:effectRef>
-          <a:fontRef idx="minor">
-            <a:schemeClr val="lt1"/>
-          </a:fontRef>
-        </p:style>
-        <p:txBody>
-          <a:bodyPr rtlCol="0" anchor="ctr"/>
-          <a:lstStyle/>
-          <a:p>
-            <a:pPr algn="ctr">
-              <a:defRPr sz="2000" b="1">
-                <a:solidFill>
-                  <a:srgbClr val="1F4E79"/>
-                </a:solidFill>
-              </a:defRPr>
-            </a:pPr>
-            <a:r>
-              <a:t>리스크</a:t>
-            </a:r>
-          </a:p>
-          <a:p>
-            <a:pPr>
-              <a:spcAft>
-                <a:spcPts val="600"/>
-              </a:spcAft>
-              <a:defRPr sz="1600">
-                <a:solidFill>
-                  <a:srgbClr val="000000"/>
-                </a:solidFill>
-              </a:defRPr>
-            </a:pPr>
-            <a:r>
-              <a:t>초기 GPU 장비 비용 큼</a:t>
-            </a:r>
-          </a:p>
-          <a:p>
-            <a:pPr>
-              <a:spcAft>
-                <a:spcPts val="600"/>
-              </a:spcAft>
-              <a:defRPr sz="1600">
-                <a:solidFill>
-                  <a:srgbClr val="000000"/>
-                </a:solidFill>
-              </a:defRPr>
-            </a:pPr>
-            <a:r>
-              <a:t>내부 운영 인력 필요</a:t>
-            </a:r>
-          </a:p>
-          <a:p>
-            <a:pPr>
-              <a:spcAft>
-                <a:spcPts val="600"/>
-              </a:spcAft>
-              <a:defRPr sz="1600">
-                <a:solidFill>
-                  <a:srgbClr val="000000"/>
-                </a:solidFill>
-              </a:defRPr>
-            </a:pPr>
-            <a:r>
-              <a:t>AI 결과는 사람 최종 검토 필요</a:t>
-            </a:r>
-          </a:p>
-          <a:p>
-            <a:pPr>
-              <a:spcAft>
-                <a:spcPts val="600"/>
-              </a:spcAft>
-              <a:defRPr sz="1600">
-                <a:solidFill>
-                  <a:srgbClr val="000000"/>
-                </a:solidFill>
-              </a:defRPr>
-            </a:pPr>
-            <a:r>
-              <a:t>상용 SaaS 대비 품질 한계 가능</a:t>
+          <p:cNvPr id="2" name="Title 1"/>
+          <p:cNvSpPr>
+            <a:spLocks noGrp="1"/>
+          </p:cNvSpPr>
+          <p:nvPr>
+            <p:ph type="title"/>
+          </p:nvPr>
+        </p:nvSpPr>
+        <p:spPr/>
+        <p:txBody>
+          <a:bodyPr/>
+          <a:lstStyle/>
+          <a:p>
+            <a:r>
+              <a:t>3. 예상 비용 (1/4)</a:t>
+            </a:r>
+          </a:p>
+        </p:txBody>
+      </p:sp>
+      <p:sp>
+        <p:nvSpPr>
+          <p:cNvPr id="3" name="Content Placeholder 2"/>
+          <p:cNvSpPr>
+            <a:spLocks noGrp="1"/>
+          </p:cNvSpPr>
+          <p:nvPr>
+            <p:ph idx="1"/>
+          </p:nvPr>
+        </p:nvSpPr>
+        <p:spPr/>
+        <p:txBody>
+          <a:bodyPr wrap="square"/>
+          <a:lstStyle/>
+          <a:p>
+            <a:pPr algn="l"/>
+            <a:r>
+              <a:rPr sz="1600"/>
+              <a:t>### 3-1. 초기 장비비(1회, 인건비 제외)</a:t>
+            </a:r>
+          </a:p>
+          <a:p>
+            <a:pPr algn="l"/>
+            <a:r>
+              <a:rPr sz="1600"/>
+              <a:t>| 항목 | 권장 구성 | 예상 비용 |</a:t>
+            </a:r>
+          </a:p>
+          <a:p>
+            <a:pPr algn="l"/>
+            <a:r>
+              <a:rPr sz="1600"/>
+              <a:t>|---|---|---:|</a:t>
+            </a:r>
+          </a:p>
+          <a:p>
+            <a:pPr algn="l"/>
+            <a:r>
+              <a:rPr sz="1600"/>
+              <a:t>| GPU 서버 | 중간형 (RTX 6000 Ada / A6000 / L40S 급, RAM 256GB) | 4,000만 ~ 6,500만원 |</a:t>
+            </a:r>
+          </a:p>
+          <a:p>
+            <a:pPr algn="l"/>
+            <a:r>
+              <a:rPr sz="1600"/>
+              <a:t>| 스토리지/백업/UPS | NAS, 백업 스토리지, UPS 등 | 300만 ~ 1,200만원 |</a:t>
+            </a:r>
+          </a:p>
+          <a:p>
+            <a:pPr algn="l"/>
+            <a:r>
+              <a:rPr sz="1600"/>
+              <a:t>| **초기 장비비 합계** | **기존 Git/Jenkins 재사용 기준** | **4,300만 ~ 7,700만원** |</a:t>
+            </a:r>
+          </a:p>
+          <a:p>
+            <a:pPr algn="l"/>
+            <a:r>
+              <a:rPr sz="1600"/>
+              <a:t>### 3-2. 소프트웨어/라이선스 비용</a:t>
+            </a:r>
+          </a:p>
+          <a:p>
+            <a:pPr algn="l"/>
+            <a:r>
+              <a:rPr sz="1600"/>
+              <a:t>| 항목 | 비용 | 비고 |</a:t>
+            </a:r>
+          </a:p>
+          <a:p>
+            <a:pPr algn="l"/>
+            <a:r>
+              <a:rPr sz="1600"/>
+              <a:t>|---|---:|---|</a:t>
+            </a:r>
+          </a:p>
+          <a:p>
+            <a:pPr algn="l"/>
+            <a:r>
+              <a:rPr sz="1600"/>
+              <a:t>| Jenkins | 0원 | 기존 장비 재사용 / 오픈소스 |</a:t>
             </a:r>
           </a:p>
         </p:txBody>
@@ -4631,133 +5807,447 @@
       <p:grpSpPr/>
       <p:sp>
         <p:nvSpPr>
-          <p:cNvPr id="2" name="TextBox 1"/>
-          <p:cNvSpPr txBox="1"/>
-          <p:nvPr/>
-        </p:nvSpPr>
-        <p:spPr>
-          <a:xfrm>
-            <a:off x="457200" y="274320"/>
-            <a:ext cx="11247120" cy="640080"/>
-          </a:xfrm>
-          <a:prstGeom prst="rect">
-            <a:avLst/>
-          </a:prstGeom>
-          <a:noFill/>
-        </p:spPr>
-        <p:txBody>
-          <a:bodyPr wrap="none">
-            <a:spAutoFit/>
-          </a:bodyPr>
-          <a:lstStyle/>
-          <a:p>
-            <a:pPr>
-              <a:defRPr sz="2600" b="1">
-                <a:solidFill>
-                  <a:srgbClr val="1F4E79"/>
-                </a:solidFill>
-              </a:defRPr>
-            </a:pPr>
-            <a:r>
-              <a:t>권장 도입안</a:t>
-            </a:r>
-          </a:p>
-        </p:txBody>
-      </p:sp>
-      <p:sp>
-        <p:nvSpPr>
-          <p:cNvPr id="3" name="TextBox 2"/>
-          <p:cNvSpPr txBox="1"/>
-          <p:nvPr/>
-        </p:nvSpPr>
-        <p:spPr>
-          <a:xfrm>
-            <a:off x="731520" y="1645920"/>
-            <a:ext cx="10515600" cy="4572000"/>
-          </a:xfrm>
-          <a:prstGeom prst="rect">
-            <a:avLst/>
-          </a:prstGeom>
-          <a:noFill/>
-        </p:spPr>
-        <p:txBody>
-          <a:bodyPr wrap="none">
-            <a:spAutoFit/>
-          </a:bodyPr>
-          <a:lstStyle/>
-          <a:p>
-            <a:pPr>
-              <a:spcAft>
-                <a:spcPts val="1000"/>
-              </a:spcAft>
-              <a:defRPr sz="2200">
-                <a:solidFill>
-                  <a:srgbClr val="000000"/>
-                </a:solidFill>
-              </a:defRPr>
-            </a:pPr>
-            <a:r>
-              <a:t>중간형 GPU 서버 1대 신규 도입</a:t>
-            </a:r>
-          </a:p>
-          <a:p>
-            <a:pPr>
-              <a:spcAft>
-                <a:spcPts val="1000"/>
-              </a:spcAft>
-              <a:defRPr sz="2200">
-                <a:solidFill>
-                  <a:srgbClr val="000000"/>
-                </a:solidFill>
-              </a:defRPr>
-            </a:pPr>
-            <a:r>
-              <a:t>기존 Git/Jenkins 장비 재사용</a:t>
-            </a:r>
-          </a:p>
-          <a:p>
-            <a:pPr>
-              <a:spcAft>
-                <a:spcPts val="1000"/>
-              </a:spcAft>
-              <a:defRPr sz="2200">
-                <a:solidFill>
-                  <a:srgbClr val="000000"/>
-                </a:solidFill>
-              </a:defRPr>
-            </a:pPr>
-            <a:r>
-              <a:t>저장소 1개 / 팀 1개 기준 MVP</a:t>
-            </a:r>
-          </a:p>
-          <a:p>
-            <a:pPr>
-              <a:spcAft>
-                <a:spcPts val="1000"/>
-              </a:spcAft>
-              <a:defRPr sz="2200">
-                <a:solidFill>
-                  <a:srgbClr val="000000"/>
-                </a:solidFill>
-              </a:defRPr>
-            </a:pPr>
-            <a:r>
-              <a:t>Reviewer 우선 -&gt; Owner 추가 -&gt; 승인/반려 루프</a:t>
-            </a:r>
-          </a:p>
-          <a:p>
-            <a:pPr>
-              <a:spcAft>
-                <a:spcPts val="1000"/>
-              </a:spcAft>
-              <a:defRPr sz="2200">
-                <a:solidFill>
-                  <a:srgbClr val="000000"/>
-                </a:solidFill>
-              </a:defRPr>
-            </a:pPr>
-            <a:r>
-              <a:t>기준 문서: GitHub Issue #170</a:t>
+          <p:cNvPr id="2" name="Title 1"/>
+          <p:cNvSpPr>
+            <a:spLocks noGrp="1"/>
+          </p:cNvSpPr>
+          <p:nvPr>
+            <p:ph type="title"/>
+          </p:nvPr>
+        </p:nvSpPr>
+        <p:spPr/>
+        <p:txBody>
+          <a:bodyPr/>
+          <a:lstStyle/>
+          <a:p>
+            <a:r>
+              <a:t>3. 예상 비용 (2/4)</a:t>
+            </a:r>
+          </a:p>
+        </p:txBody>
+      </p:sp>
+      <p:sp>
+        <p:nvSpPr>
+          <p:cNvPr id="3" name="Content Placeholder 2"/>
+          <p:cNvSpPr>
+            <a:spLocks noGrp="1"/>
+          </p:cNvSpPr>
+          <p:nvPr>
+            <p:ph idx="1"/>
+          </p:nvPr>
+        </p:nvSpPr>
+        <p:spPr/>
+        <p:txBody>
+          <a:bodyPr wrap="square"/>
+          <a:lstStyle/>
+          <a:p>
+            <a:pPr algn="l"/>
+            <a:r>
+              <a:rPr sz="1600"/>
+              <a:t>| 내부 Git (Gitea Self-Managed) | 0원 | 기존 장비 재사용 / 오픈소스 |</a:t>
+            </a:r>
+          </a:p>
+          <a:p>
+            <a:pPr algn="l"/>
+            <a:r>
+              <a:rPr sz="1600"/>
+              <a:t>| 내부 Git (GitLab Self-Managed Free) | 0원부터 | 기존 장비 재사용 가능 |</a:t>
+            </a:r>
+          </a:p>
+          <a:p>
+            <a:pPr algn="l"/>
+            <a:r>
+              <a:rPr sz="1600"/>
+              <a:t>| 내부 LLM 모델 | 0원부터 | 오픈소스 모델 기준, 반입/운영 비용 별도 |</a:t>
+            </a:r>
+          </a:p>
+          <a:p>
+            <a:pPr algn="l"/>
+            <a:r>
+              <a:rPr sz="1600"/>
+              <a:t>### 3-3. 월간 운영비</a:t>
+            </a:r>
+          </a:p>
+          <a:p>
+            <a:pPr algn="l"/>
+            <a:r>
+              <a:rPr sz="1600"/>
+              <a:t>| 구분 | 예상 비용 |</a:t>
+            </a:r>
+          </a:p>
+          <a:p>
+            <a:pPr algn="l"/>
+            <a:r>
+              <a:rPr sz="1600"/>
+              <a:t>|---|---:|</a:t>
+            </a:r>
+          </a:p>
+          <a:p>
+            <a:pPr algn="l"/>
+            <a:r>
+              <a:rPr sz="1600"/>
+              <a:t>| 인프라/실비 운영비 | 100만 ~ 220만원/월 |</a:t>
+            </a:r>
+          </a:p>
+          <a:p>
+            <a:pPr algn="l"/>
+            <a:r>
+              <a:rPr sz="1600"/>
+              <a:t>| 운영관리 시간을 별도 비용으로 제외할 경우 | 50만 ~ 120만원/월 |</a:t>
+            </a:r>
+          </a:p>
+          <a:p>
+            <a:pPr algn="l"/>
+            <a:r>
+              <a:rPr sz="1600"/>
+              <a:t>### 3-4. 연간 운영비</a:t>
+            </a:r>
+          </a:p>
+          <a:p>
+            <a:pPr algn="l"/>
+            <a:r>
+              <a:rPr sz="1600"/>
+              <a:t>| 구분 | 예상 비용 |</a:t>
+            </a:r>
+          </a:p>
+        </p:txBody>
+      </p:sp>
+    </p:spTree>
+  </p:cSld>
+  <p:clrMapOvr>
+    <a:masterClrMapping/>
+  </p:clrMapOvr>
+</p:sld>
+</file>
+
+<file path=ppt/slides/slide7.xml><?xml version="1.0" encoding="utf-8"?>
+<p:sld xmlns:a="http://schemas.openxmlformats.org/drawingml/2006/main" xmlns:p="http://schemas.openxmlformats.org/presentationml/2006/main" xmlns:r="http://schemas.openxmlformats.org/officeDocument/2006/relationships">
+  <p:cSld>
+    <p:spTree>
+      <p:nvGrpSpPr>
+        <p:cNvPr id="1" name=""/>
+        <p:cNvGrpSpPr/>
+        <p:nvPr/>
+      </p:nvGrpSpPr>
+      <p:grpSpPr/>
+      <p:sp>
+        <p:nvSpPr>
+          <p:cNvPr id="2" name="Title 1"/>
+          <p:cNvSpPr>
+            <a:spLocks noGrp="1"/>
+          </p:cNvSpPr>
+          <p:nvPr>
+            <p:ph type="title"/>
+          </p:nvPr>
+        </p:nvSpPr>
+        <p:spPr/>
+        <p:txBody>
+          <a:bodyPr/>
+          <a:lstStyle/>
+          <a:p>
+            <a:r>
+              <a:t>3. 예상 비용 (3/4)</a:t>
+            </a:r>
+          </a:p>
+        </p:txBody>
+      </p:sp>
+      <p:sp>
+        <p:nvSpPr>
+          <p:cNvPr id="3" name="Content Placeholder 2"/>
+          <p:cNvSpPr>
+            <a:spLocks noGrp="1"/>
+          </p:cNvSpPr>
+          <p:nvPr>
+            <p:ph idx="1"/>
+          </p:nvPr>
+        </p:nvSpPr>
+        <p:spPr/>
+        <p:txBody>
+          <a:bodyPr wrap="square"/>
+          <a:lstStyle/>
+          <a:p>
+            <a:pPr algn="l"/>
+            <a:r>
+              <a:rPr sz="1600"/>
+              <a:t>|---|---:|</a:t>
+            </a:r>
+          </a:p>
+          <a:p>
+            <a:pPr algn="l"/>
+            <a:r>
+              <a:rPr sz="1600"/>
+              <a:t>| 인프라/실비 운영비 | 1,200만 ~ 2,640만원/년 |</a:t>
+            </a:r>
+          </a:p>
+          <a:p>
+            <a:pPr algn="l"/>
+            <a:r>
+              <a:rPr sz="1600"/>
+              <a:t>| 운영관리 시간을 별도 비용으로 제외할 경우 | 600만 ~ 1,440만원/년 |</a:t>
+            </a:r>
+          </a:p>
+          <a:p>
+            <a:pPr algn="l"/>
+            <a:r>
+              <a:rPr sz="1600"/>
+              <a:t>### 3-5. 세부 견적 예시 (중간형 기준)</a:t>
+            </a:r>
+          </a:p>
+          <a:p>
+            <a:pPr algn="l"/>
+            <a:r>
+              <a:rPr sz="1600"/>
+              <a:t>| 항목 | 수량 | 단가(예상) | 합계(예상) | 비고 |</a:t>
+            </a:r>
+          </a:p>
+          <a:p>
+            <a:pPr algn="l"/>
+            <a:r>
+              <a:rPr sz="1600"/>
+              <a:t>|---|---:|---:|---:|---|</a:t>
+            </a:r>
+          </a:p>
+          <a:p>
+            <a:pPr algn="l"/>
+            <a:r>
+              <a:rPr sz="1600"/>
+              <a:t>| GPU 서버 | 1 | 4,000만 ~ 6,500만원 | 4,000만 ~ 6,500만원 | 중간형 GPU 2장 기준 서버/워크스테이션 |</a:t>
+            </a:r>
+          </a:p>
+          <a:p>
+            <a:pPr algn="l"/>
+            <a:r>
+              <a:rPr sz="1600"/>
+              <a:t>| NAS/백업 스토리지 | 1식 | 200만 ~ 700만원 | 200만 ~ 700만원 | 내부 백업/이력 저장 |</a:t>
+            </a:r>
+          </a:p>
+          <a:p>
+            <a:pPr algn="l"/>
+            <a:r>
+              <a:rPr sz="1600"/>
+              <a:t>| UPS | 1식 | 100만 ~ 500만원 | 100만 ~ 500만원 | 정전 보호 |</a:t>
+            </a:r>
+          </a:p>
+          <a:p>
+            <a:pPr algn="l"/>
+            <a:r>
+              <a:rPr sz="1600"/>
+              <a:t>| 네트워크/부대자재 | 1식 | 0만 ~ 0원 | 0원 | 기존 Git/Jenkins 환경 활용 가정 |</a:t>
+            </a:r>
+          </a:p>
+        </p:txBody>
+      </p:sp>
+    </p:spTree>
+  </p:cSld>
+  <p:clrMapOvr>
+    <a:masterClrMapping/>
+  </p:clrMapOvr>
+</p:sld>
+</file>
+
+<file path=ppt/slides/slide8.xml><?xml version="1.0" encoding="utf-8"?>
+<p:sld xmlns:a="http://schemas.openxmlformats.org/drawingml/2006/main" xmlns:p="http://schemas.openxmlformats.org/presentationml/2006/main" xmlns:r="http://schemas.openxmlformats.org/officeDocument/2006/relationships">
+  <p:cSld>
+    <p:spTree>
+      <p:nvGrpSpPr>
+        <p:cNvPr id="1" name=""/>
+        <p:cNvGrpSpPr/>
+        <p:nvPr/>
+      </p:nvGrpSpPr>
+      <p:grpSpPr/>
+      <p:sp>
+        <p:nvSpPr>
+          <p:cNvPr id="2" name="Title 1"/>
+          <p:cNvSpPr>
+            <a:spLocks noGrp="1"/>
+          </p:cNvSpPr>
+          <p:nvPr>
+            <p:ph type="title"/>
+          </p:nvPr>
+        </p:nvSpPr>
+        <p:spPr/>
+        <p:txBody>
+          <a:bodyPr/>
+          <a:lstStyle/>
+          <a:p>
+            <a:r>
+              <a:t>3. 예상 비용 (4/4)</a:t>
+            </a:r>
+          </a:p>
+        </p:txBody>
+      </p:sp>
+      <p:sp>
+        <p:nvSpPr>
+          <p:cNvPr id="3" name="Content Placeholder 2"/>
+          <p:cNvSpPr>
+            <a:spLocks noGrp="1"/>
+          </p:cNvSpPr>
+          <p:nvPr>
+            <p:ph idx="1"/>
+          </p:nvPr>
+        </p:nvSpPr>
+        <p:spPr/>
+        <p:txBody>
+          <a:bodyPr wrap="square"/>
+          <a:lstStyle/>
+          <a:p>
+            <a:pPr algn="l"/>
+            <a:r>
+              <a:rPr sz="1600"/>
+              <a:t>| **총합** |  |  | **4,300만 ~ 7,700만원** | 장비비만 산정 |</a:t>
+            </a:r>
+          </a:p>
+          <a:p>
+            <a:pPr algn="l"/>
+            <a:r>
+              <a:rPr sz="1600"/>
+              <a:t>권장안:</a:t>
+            </a:r>
+          </a:p>
+          <a:p>
+            <a:pPr algn="l"/>
+            <a:r>
+              <a:rPr sz="1600"/>
+              <a:t>50명 이내 회사 기준 **중간형 GPU 서버 1대**가 현실적</a:t>
+            </a:r>
+          </a:p>
+          <a:p>
+            <a:pPr algn="l"/>
+            <a:r>
+              <a:rPr sz="1600"/>
+              <a:t>**기존 Git/Jenkins 장비 재사용** 전제 시 비용 효율이 가장 좋음</a:t>
+            </a:r>
+          </a:p>
+          <a:p>
+            <a:pPr algn="l"/>
+            <a:r>
+              <a:rPr sz="1600"/>
+              <a:t>운영 범위는 **저장소 1개, 팀 1개 기준 MVP**로 작게 시작 권장</a:t>
+            </a:r>
+          </a:p>
+        </p:txBody>
+      </p:sp>
+    </p:spTree>
+  </p:cSld>
+  <p:clrMapOvr>
+    <a:masterClrMapping/>
+  </p:clrMapOvr>
+</p:sld>
+</file>
+
+<file path=ppt/slides/slide9.xml><?xml version="1.0" encoding="utf-8"?>
+<p:sld xmlns:a="http://schemas.openxmlformats.org/drawingml/2006/main" xmlns:p="http://schemas.openxmlformats.org/presentationml/2006/main" xmlns:r="http://schemas.openxmlformats.org/officeDocument/2006/relationships">
+  <p:cSld>
+    <p:spTree>
+      <p:nvGrpSpPr>
+        <p:cNvPr id="1" name=""/>
+        <p:cNvGrpSpPr/>
+        <p:nvPr/>
+      </p:nvGrpSpPr>
+      <p:grpSpPr/>
+      <p:sp>
+        <p:nvSpPr>
+          <p:cNvPr id="2" name="Title 1"/>
+          <p:cNvSpPr>
+            <a:spLocks noGrp="1"/>
+          </p:cNvSpPr>
+          <p:nvPr>
+            <p:ph type="title"/>
+          </p:nvPr>
+        </p:nvSpPr>
+        <p:spPr/>
+        <p:txBody>
+          <a:bodyPr/>
+          <a:lstStyle/>
+          <a:p>
+            <a:r>
+              <a:t>4. 구축 방법 (1/2)</a:t>
+            </a:r>
+          </a:p>
+        </p:txBody>
+      </p:sp>
+      <p:sp>
+        <p:nvSpPr>
+          <p:cNvPr id="3" name="Content Placeholder 2"/>
+          <p:cNvSpPr>
+            <a:spLocks noGrp="1"/>
+          </p:cNvSpPr>
+          <p:nvPr>
+            <p:ph idx="1"/>
+          </p:nvPr>
+        </p:nvSpPr>
+        <p:spPr/>
+        <p:txBody>
+          <a:bodyPr wrap="square"/>
+          <a:lstStyle/>
+          <a:p>
+            <a:pPr algn="l"/>
+            <a:r>
+              <a:rPr sz="1600"/>
+              <a:t>### 단계별 구축</a:t>
+            </a:r>
+          </a:p>
+          <a:p>
+            <a:pPr algn="l"/>
+            <a:r>
+              <a:rPr sz="1600"/>
+              <a:t>#### 1단계: Reviewer 우선 도입</a:t>
+            </a:r>
+          </a:p>
+          <a:p>
+            <a:pPr algn="l"/>
+            <a:r>
+              <a:rPr sz="1600"/>
+              <a:t>diff 읽기</a:t>
+            </a:r>
+          </a:p>
+          <a:p>
+            <a:pPr algn="l"/>
+            <a:r>
+              <a:rPr sz="1600"/>
+              <a:t>테스트 실행</a:t>
+            </a:r>
+          </a:p>
+          <a:p>
+            <a:pPr algn="l"/>
+            <a:r>
+              <a:rPr sz="1600"/>
+              <a:t>리뷰 결과 생성</a:t>
+            </a:r>
+          </a:p>
+          <a:p>
+            <a:pPr algn="l"/>
+            <a:r>
+              <a:rPr sz="1600"/>
+              <a:t>#### 2단계: Owner 기능 추가</a:t>
+            </a:r>
+          </a:p>
+          <a:p>
+            <a:pPr algn="l"/>
+            <a:r>
+              <a:rPr sz="1600"/>
+              <a:t>작업 브랜치 수정</a:t>
+            </a:r>
+          </a:p>
+          <a:p>
+            <a:pPr algn="l"/>
+            <a:r>
+              <a:rPr sz="1600"/>
+              <a:t>테스트 실행</a:t>
+            </a:r>
+          </a:p>
+          <a:p>
+            <a:pPr algn="l"/>
+            <a:r>
+              <a:rPr sz="1600"/>
+              <a:t>PR 생성</a:t>
+            </a:r>
+          </a:p>
+          <a:p>
+            <a:pPr algn="l"/>
+            <a:r>
+              <a:rPr sz="1600"/>
+              <a:t>#### 3단계: 승인/반려 루프 구축</a:t>
             </a:r>
           </a:p>
         </p:txBody>
